--- a/04.Langchain_Structured_output/LangChain_Structured_Output_Part2A.pptx
+++ b/04.Langchain_Structured_output/LangChain_Structured_Output_Part2A.pptx
@@ -74,20 +74,29 @@
             <a:noAutofit/>
           </a:bodyPr>
           <a:p>
-            <a:r>
-              <a:rPr b="0" lang="en-IN" sz="1800" spc="-1" strike="noStrike">
-                <a:solidFill>
-                  <a:srgbClr val="000000"/>
-                </a:solidFill>
-                <a:latin typeface="Calibri"/>
-              </a:rPr>
-              <a:t>Click to move the slide</a:t>
-            </a:r>
-            <a:endParaRPr b="0" lang="en-IN" sz="1800" spc="-1" strike="noStrike">
-              <a:solidFill>
-                <a:srgbClr val="000000"/>
-              </a:solidFill>
-              <a:latin typeface="Calibri"/>
+            <a:pPr algn="ctr">
+              <a:buNone/>
+            </a:pPr>
+            <a:r>
+              <a:rPr b="0" lang="en-IN" sz="4400" spc="-1" strike="noStrike">
+                <a:latin typeface="Arial"/>
+              </a:rPr>
+              <a:t>Click to </a:t>
+            </a:r>
+            <a:r>
+              <a:rPr b="0" lang="en-IN" sz="4400" spc="-1" strike="noStrike">
+                <a:latin typeface="Arial"/>
+              </a:rPr>
+              <a:t>move </a:t>
+            </a:r>
+            <a:r>
+              <a:rPr b="0" lang="en-IN" sz="4400" spc="-1" strike="noStrike">
+                <a:latin typeface="Arial"/>
+              </a:rPr>
+              <a:t>the slide</a:t>
+            </a:r>
+            <a:endParaRPr b="0" lang="en-IN" sz="4400" spc="-1" strike="noStrike">
+              <a:latin typeface="Arial"/>
             </a:endParaRPr>
           </a:p>
         </p:txBody>
@@ -315,7 +324,7 @@
             <a:pPr algn="r">
               <a:buNone/>
             </a:pPr>
-            <a:fld id="{8990E247-C3AA-4EB4-8C6C-13084F08C1EA}" type="slidenum">
+            <a:fld id="{DB7B614F-AA9C-4D34-98CB-7FA994D4E66C}" type="slidenum">
               <a:rPr b="0" lang="en-IN" sz="1400" spc="-1" strike="noStrike">
                 <a:latin typeface="Times New Roman"/>
               </a:rPr>
@@ -363,7 +372,7 @@
         <p:spPr>
           <a:xfrm>
             <a:off x="685800" y="1143000"/>
-            <a:ext cx="5486040" cy="3085920"/>
+            <a:ext cx="5485680" cy="3085560"/>
           </a:xfrm>
           <a:prstGeom prst="rect">
             <a:avLst/>
@@ -386,18 +395,18 @@
         <p:spPr>
           <a:xfrm>
             <a:off x="685800" y="4400640"/>
-            <a:ext cx="5486040" cy="3600000"/>
-          </a:xfrm>
-          <a:prstGeom prst="rect">
-            <a:avLst/>
-          </a:prstGeom>
-          <a:noFill/>
-          <a:ln w="0">
-            <a:noFill/>
-          </a:ln>
-        </p:spPr>
-        <p:txBody>
-          <a:bodyPr anchor="t">
+            <a:ext cx="5485680" cy="3599640"/>
+          </a:xfrm>
+          <a:prstGeom prst="rect">
+            <a:avLst/>
+          </a:prstGeom>
+          <a:noFill/>
+          <a:ln w="0">
+            <a:noFill/>
+          </a:ln>
+        </p:spPr>
+        <p:txBody>
+          <a:bodyPr lIns="0" rIns="0" tIns="0" bIns="0" anchor="t">
             <a:noAutofit/>
           </a:bodyPr>
           <a:p>
@@ -420,18 +429,18 @@
         <p:spPr>
           <a:xfrm>
             <a:off x="3884760" y="8685360"/>
-            <a:ext cx="2971440" cy="458280"/>
-          </a:xfrm>
-          <a:prstGeom prst="rect">
-            <a:avLst/>
-          </a:prstGeom>
-          <a:noFill/>
-          <a:ln w="0">
-            <a:noFill/>
-          </a:ln>
-        </p:spPr>
-        <p:txBody>
-          <a:bodyPr anchor="b">
+            <a:ext cx="2971080" cy="457920"/>
+          </a:xfrm>
+          <a:prstGeom prst="rect">
+            <a:avLst/>
+          </a:prstGeom>
+          <a:noFill/>
+          <a:ln w="0">
+            <a:noFill/>
+          </a:ln>
+        </p:spPr>
+        <p:txBody>
+          <a:bodyPr lIns="0" rIns="0" tIns="0" bIns="0" anchor="b">
             <a:noAutofit/>
           </a:bodyPr>
           <a:lstStyle>
@@ -456,7 +465,7 @@
               </a:lnSpc>
               <a:buNone/>
             </a:pPr>
-            <a:fld id="{EF0BB0AE-4094-4E7B-9414-6D66DA35F26A}" type="slidenum">
+            <a:fld id="{B633122E-DF7D-4ACF-B60F-F948988C8119}" type="slidenum">
               <a:rPr b="0" lang="en-US" sz="1200" spc="-1" strike="noStrike">
                 <a:solidFill>
                   <a:srgbClr val="000000"/>
@@ -507,7 +516,7 @@
         <p:spPr>
           <a:xfrm>
             <a:off x="685800" y="1143000"/>
-            <a:ext cx="5486040" cy="3085920"/>
+            <a:ext cx="5485680" cy="3085560"/>
           </a:xfrm>
           <a:prstGeom prst="rect">
             <a:avLst/>
@@ -530,18 +539,18 @@
         <p:spPr>
           <a:xfrm>
             <a:off x="685800" y="4400640"/>
-            <a:ext cx="5486040" cy="3600000"/>
-          </a:xfrm>
-          <a:prstGeom prst="rect">
-            <a:avLst/>
-          </a:prstGeom>
-          <a:noFill/>
-          <a:ln w="0">
-            <a:noFill/>
-          </a:ln>
-        </p:spPr>
-        <p:txBody>
-          <a:bodyPr anchor="t">
+            <a:ext cx="5485680" cy="3599640"/>
+          </a:xfrm>
+          <a:prstGeom prst="rect">
+            <a:avLst/>
+          </a:prstGeom>
+          <a:noFill/>
+          <a:ln w="0">
+            <a:noFill/>
+          </a:ln>
+        </p:spPr>
+        <p:txBody>
+          <a:bodyPr lIns="0" rIns="0" tIns="0" bIns="0" anchor="t">
             <a:noAutofit/>
           </a:bodyPr>
           <a:p>
@@ -564,18 +573,18 @@
         <p:spPr>
           <a:xfrm>
             <a:off x="3884760" y="8685360"/>
-            <a:ext cx="2971440" cy="458280"/>
-          </a:xfrm>
-          <a:prstGeom prst="rect">
-            <a:avLst/>
-          </a:prstGeom>
-          <a:noFill/>
-          <a:ln w="0">
-            <a:noFill/>
-          </a:ln>
-        </p:spPr>
-        <p:txBody>
-          <a:bodyPr anchor="b">
+            <a:ext cx="2971080" cy="457920"/>
+          </a:xfrm>
+          <a:prstGeom prst="rect">
+            <a:avLst/>
+          </a:prstGeom>
+          <a:noFill/>
+          <a:ln w="0">
+            <a:noFill/>
+          </a:ln>
+        </p:spPr>
+        <p:txBody>
+          <a:bodyPr lIns="0" rIns="0" tIns="0" bIns="0" anchor="b">
             <a:noAutofit/>
           </a:bodyPr>
           <a:lstStyle>
@@ -600,7 +609,7 @@
               </a:lnSpc>
               <a:buNone/>
             </a:pPr>
-            <a:fld id="{F0D4BD05-F38D-4E5C-BE6D-7D769A224CCF}" type="slidenum">
+            <a:fld id="{1B9F978B-E1E9-424D-8737-604FD30C999C}" type="slidenum">
               <a:rPr b="0" lang="en-US" sz="1200" spc="-1" strike="noStrike">
                 <a:solidFill>
                   <a:srgbClr val="000000"/>
@@ -651,7 +660,7 @@
         <p:spPr>
           <a:xfrm>
             <a:off x="685800" y="1143000"/>
-            <a:ext cx="5486040" cy="3085920"/>
+            <a:ext cx="5485680" cy="3085560"/>
           </a:xfrm>
           <a:prstGeom prst="rect">
             <a:avLst/>
@@ -674,18 +683,18 @@
         <p:spPr>
           <a:xfrm>
             <a:off x="685800" y="4400640"/>
-            <a:ext cx="5486040" cy="3600000"/>
-          </a:xfrm>
-          <a:prstGeom prst="rect">
-            <a:avLst/>
-          </a:prstGeom>
-          <a:noFill/>
-          <a:ln w="0">
-            <a:noFill/>
-          </a:ln>
-        </p:spPr>
-        <p:txBody>
-          <a:bodyPr anchor="t">
+            <a:ext cx="5485680" cy="3599640"/>
+          </a:xfrm>
+          <a:prstGeom prst="rect">
+            <a:avLst/>
+          </a:prstGeom>
+          <a:noFill/>
+          <a:ln w="0">
+            <a:noFill/>
+          </a:ln>
+        </p:spPr>
+        <p:txBody>
+          <a:bodyPr lIns="0" rIns="0" tIns="0" bIns="0" anchor="t">
             <a:noAutofit/>
           </a:bodyPr>
           <a:p>
@@ -708,18 +717,18 @@
         <p:spPr>
           <a:xfrm>
             <a:off x="3884760" y="8685360"/>
-            <a:ext cx="2971440" cy="458280"/>
-          </a:xfrm>
-          <a:prstGeom prst="rect">
-            <a:avLst/>
-          </a:prstGeom>
-          <a:noFill/>
-          <a:ln w="0">
-            <a:noFill/>
-          </a:ln>
-        </p:spPr>
-        <p:txBody>
-          <a:bodyPr anchor="b">
+            <a:ext cx="2971080" cy="457920"/>
+          </a:xfrm>
+          <a:prstGeom prst="rect">
+            <a:avLst/>
+          </a:prstGeom>
+          <a:noFill/>
+          <a:ln w="0">
+            <a:noFill/>
+          </a:ln>
+        </p:spPr>
+        <p:txBody>
+          <a:bodyPr lIns="0" rIns="0" tIns="0" bIns="0" anchor="b">
             <a:noAutofit/>
           </a:bodyPr>
           <a:lstStyle>
@@ -744,7 +753,7 @@
               </a:lnSpc>
               <a:buNone/>
             </a:pPr>
-            <a:fld id="{85EC9B05-F571-4F1D-A30E-07684D02A01A}" type="slidenum">
+            <a:fld id="{57E91990-E3EA-4517-B2D7-BDF98EDDB2C5}" type="slidenum">
               <a:rPr b="0" lang="en-US" sz="1200" spc="-1" strike="noStrike">
                 <a:solidFill>
                   <a:srgbClr val="000000"/>
@@ -795,7 +804,7 @@
         <p:spPr>
           <a:xfrm>
             <a:off x="685800" y="1143000"/>
-            <a:ext cx="5486040" cy="3085920"/>
+            <a:ext cx="5485680" cy="3085560"/>
           </a:xfrm>
           <a:prstGeom prst="rect">
             <a:avLst/>
@@ -818,18 +827,18 @@
         <p:spPr>
           <a:xfrm>
             <a:off x="685800" y="4400640"/>
-            <a:ext cx="5486040" cy="3600000"/>
-          </a:xfrm>
-          <a:prstGeom prst="rect">
-            <a:avLst/>
-          </a:prstGeom>
-          <a:noFill/>
-          <a:ln w="0">
-            <a:noFill/>
-          </a:ln>
-        </p:spPr>
-        <p:txBody>
-          <a:bodyPr anchor="t">
+            <a:ext cx="5485680" cy="3599640"/>
+          </a:xfrm>
+          <a:prstGeom prst="rect">
+            <a:avLst/>
+          </a:prstGeom>
+          <a:noFill/>
+          <a:ln w="0">
+            <a:noFill/>
+          </a:ln>
+        </p:spPr>
+        <p:txBody>
+          <a:bodyPr lIns="0" rIns="0" tIns="0" bIns="0" anchor="t">
             <a:noAutofit/>
           </a:bodyPr>
           <a:p>
@@ -852,18 +861,18 @@
         <p:spPr>
           <a:xfrm>
             <a:off x="3884760" y="8685360"/>
-            <a:ext cx="2971440" cy="458280"/>
-          </a:xfrm>
-          <a:prstGeom prst="rect">
-            <a:avLst/>
-          </a:prstGeom>
-          <a:noFill/>
-          <a:ln w="0">
-            <a:noFill/>
-          </a:ln>
-        </p:spPr>
-        <p:txBody>
-          <a:bodyPr anchor="b">
+            <a:ext cx="2971080" cy="457920"/>
+          </a:xfrm>
+          <a:prstGeom prst="rect">
+            <a:avLst/>
+          </a:prstGeom>
+          <a:noFill/>
+          <a:ln w="0">
+            <a:noFill/>
+          </a:ln>
+        </p:spPr>
+        <p:txBody>
+          <a:bodyPr lIns="0" rIns="0" tIns="0" bIns="0" anchor="b">
             <a:noAutofit/>
           </a:bodyPr>
           <a:lstStyle>
@@ -888,7 +897,7 @@
               </a:lnSpc>
               <a:buNone/>
             </a:pPr>
-            <a:fld id="{23A197FA-755E-4C43-864C-4F4C36AC42D4}" type="slidenum">
+            <a:fld id="{9DCFB594-819A-408E-A908-E511423E6DB8}" type="slidenum">
               <a:rPr b="0" lang="en-US" sz="1200" spc="-1" strike="noStrike">
                 <a:solidFill>
                   <a:srgbClr val="000000"/>
@@ -939,7 +948,7 @@
         <p:spPr>
           <a:xfrm>
             <a:off x="685800" y="1143000"/>
-            <a:ext cx="5486040" cy="3085920"/>
+            <a:ext cx="5485680" cy="3085560"/>
           </a:xfrm>
           <a:prstGeom prst="rect">
             <a:avLst/>
@@ -962,18 +971,18 @@
         <p:spPr>
           <a:xfrm>
             <a:off x="685800" y="4400640"/>
-            <a:ext cx="5486040" cy="3600000"/>
-          </a:xfrm>
-          <a:prstGeom prst="rect">
-            <a:avLst/>
-          </a:prstGeom>
-          <a:noFill/>
-          <a:ln w="0">
-            <a:noFill/>
-          </a:ln>
-        </p:spPr>
-        <p:txBody>
-          <a:bodyPr anchor="t">
+            <a:ext cx="5485680" cy="3599640"/>
+          </a:xfrm>
+          <a:prstGeom prst="rect">
+            <a:avLst/>
+          </a:prstGeom>
+          <a:noFill/>
+          <a:ln w="0">
+            <a:noFill/>
+          </a:ln>
+        </p:spPr>
+        <p:txBody>
+          <a:bodyPr lIns="0" rIns="0" tIns="0" bIns="0" anchor="t">
             <a:noAutofit/>
           </a:bodyPr>
           <a:p>
@@ -996,18 +1005,18 @@
         <p:spPr>
           <a:xfrm>
             <a:off x="3884760" y="8685360"/>
-            <a:ext cx="2971440" cy="458280"/>
-          </a:xfrm>
-          <a:prstGeom prst="rect">
-            <a:avLst/>
-          </a:prstGeom>
-          <a:noFill/>
-          <a:ln w="0">
-            <a:noFill/>
-          </a:ln>
-        </p:spPr>
-        <p:txBody>
-          <a:bodyPr anchor="b">
+            <a:ext cx="2971080" cy="457920"/>
+          </a:xfrm>
+          <a:prstGeom prst="rect">
+            <a:avLst/>
+          </a:prstGeom>
+          <a:noFill/>
+          <a:ln w="0">
+            <a:noFill/>
+          </a:ln>
+        </p:spPr>
+        <p:txBody>
+          <a:bodyPr lIns="0" rIns="0" tIns="0" bIns="0" anchor="b">
             <a:noAutofit/>
           </a:bodyPr>
           <a:lstStyle>
@@ -1032,7 +1041,7 @@
               </a:lnSpc>
               <a:buNone/>
             </a:pPr>
-            <a:fld id="{07A5A92C-E002-437D-820A-F7C9DD524AB8}" type="slidenum">
+            <a:fld id="{771EFC68-01AF-4206-982A-B67B629C3264}" type="slidenum">
               <a:rPr b="0" lang="en-US" sz="1200" spc="-1" strike="noStrike">
                 <a:solidFill>
                   <a:srgbClr val="000000"/>
@@ -1083,7 +1092,7 @@
         <p:spPr>
           <a:xfrm>
             <a:off x="685800" y="1143000"/>
-            <a:ext cx="5486040" cy="3085920"/>
+            <a:ext cx="5485680" cy="3085560"/>
           </a:xfrm>
           <a:prstGeom prst="rect">
             <a:avLst/>
@@ -1106,18 +1115,18 @@
         <p:spPr>
           <a:xfrm>
             <a:off x="685800" y="4400640"/>
-            <a:ext cx="5486040" cy="3600000"/>
-          </a:xfrm>
-          <a:prstGeom prst="rect">
-            <a:avLst/>
-          </a:prstGeom>
-          <a:noFill/>
-          <a:ln w="0">
-            <a:noFill/>
-          </a:ln>
-        </p:spPr>
-        <p:txBody>
-          <a:bodyPr anchor="t">
+            <a:ext cx="5485680" cy="3599640"/>
+          </a:xfrm>
+          <a:prstGeom prst="rect">
+            <a:avLst/>
+          </a:prstGeom>
+          <a:noFill/>
+          <a:ln w="0">
+            <a:noFill/>
+          </a:ln>
+        </p:spPr>
+        <p:txBody>
+          <a:bodyPr lIns="0" rIns="0" tIns="0" bIns="0" anchor="t">
             <a:noAutofit/>
           </a:bodyPr>
           <a:p>
@@ -1140,18 +1149,18 @@
         <p:spPr>
           <a:xfrm>
             <a:off x="3884760" y="8685360"/>
-            <a:ext cx="2971440" cy="458280"/>
-          </a:xfrm>
-          <a:prstGeom prst="rect">
-            <a:avLst/>
-          </a:prstGeom>
-          <a:noFill/>
-          <a:ln w="0">
-            <a:noFill/>
-          </a:ln>
-        </p:spPr>
-        <p:txBody>
-          <a:bodyPr anchor="b">
+            <a:ext cx="2971080" cy="457920"/>
+          </a:xfrm>
+          <a:prstGeom prst="rect">
+            <a:avLst/>
+          </a:prstGeom>
+          <a:noFill/>
+          <a:ln w="0">
+            <a:noFill/>
+          </a:ln>
+        </p:spPr>
+        <p:txBody>
+          <a:bodyPr lIns="0" rIns="0" tIns="0" bIns="0" anchor="b">
             <a:noAutofit/>
           </a:bodyPr>
           <a:lstStyle>
@@ -1176,7 +1185,7 @@
               </a:lnSpc>
               <a:buNone/>
             </a:pPr>
-            <a:fld id="{005BA1A9-B5CB-4295-AFC1-68C4068829A0}" type="slidenum">
+            <a:fld id="{AF1A41D3-611E-4B93-BFB7-2A72516B9982}" type="slidenum">
               <a:rPr b="0" lang="en-US" sz="1200" spc="-1" strike="noStrike">
                 <a:solidFill>
                   <a:srgbClr val="000000"/>
@@ -1227,7 +1236,7 @@
         <p:spPr>
           <a:xfrm>
             <a:off x="685800" y="1143000"/>
-            <a:ext cx="5486040" cy="3085920"/>
+            <a:ext cx="5485680" cy="3085560"/>
           </a:xfrm>
           <a:prstGeom prst="rect">
             <a:avLst/>
@@ -1250,18 +1259,18 @@
         <p:spPr>
           <a:xfrm>
             <a:off x="685800" y="4400640"/>
-            <a:ext cx="5486040" cy="3600000"/>
-          </a:xfrm>
-          <a:prstGeom prst="rect">
-            <a:avLst/>
-          </a:prstGeom>
-          <a:noFill/>
-          <a:ln w="0">
-            <a:noFill/>
-          </a:ln>
-        </p:spPr>
-        <p:txBody>
-          <a:bodyPr anchor="t">
+            <a:ext cx="5485680" cy="3599640"/>
+          </a:xfrm>
+          <a:prstGeom prst="rect">
+            <a:avLst/>
+          </a:prstGeom>
+          <a:noFill/>
+          <a:ln w="0">
+            <a:noFill/>
+          </a:ln>
+        </p:spPr>
+        <p:txBody>
+          <a:bodyPr lIns="0" rIns="0" tIns="0" bIns="0" anchor="t">
             <a:noAutofit/>
           </a:bodyPr>
           <a:p>
@@ -1284,18 +1293,18 @@
         <p:spPr>
           <a:xfrm>
             <a:off x="3884760" y="8685360"/>
-            <a:ext cx="2971440" cy="458280"/>
-          </a:xfrm>
-          <a:prstGeom prst="rect">
-            <a:avLst/>
-          </a:prstGeom>
-          <a:noFill/>
-          <a:ln w="0">
-            <a:noFill/>
-          </a:ln>
-        </p:spPr>
-        <p:txBody>
-          <a:bodyPr anchor="b">
+            <a:ext cx="2971080" cy="457920"/>
+          </a:xfrm>
+          <a:prstGeom prst="rect">
+            <a:avLst/>
+          </a:prstGeom>
+          <a:noFill/>
+          <a:ln w="0">
+            <a:noFill/>
+          </a:ln>
+        </p:spPr>
+        <p:txBody>
+          <a:bodyPr lIns="0" rIns="0" tIns="0" bIns="0" anchor="b">
             <a:noAutofit/>
           </a:bodyPr>
           <a:lstStyle>
@@ -1320,7 +1329,7 @@
               </a:lnSpc>
               <a:buNone/>
             </a:pPr>
-            <a:fld id="{69820B34-7756-4283-991E-9FE4F7416E1B}" type="slidenum">
+            <a:fld id="{0DA84420-C5E3-4201-B917-420CFBDD4FB0}" type="slidenum">
               <a:rPr b="0" lang="en-US" sz="1200" spc="-1" strike="noStrike">
                 <a:solidFill>
                   <a:srgbClr val="000000"/>
@@ -1371,7 +1380,7 @@
         <p:spPr>
           <a:xfrm>
             <a:off x="685800" y="1143000"/>
-            <a:ext cx="5486040" cy="3085920"/>
+            <a:ext cx="5485680" cy="3085560"/>
           </a:xfrm>
           <a:prstGeom prst="rect">
             <a:avLst/>
@@ -1394,18 +1403,18 @@
         <p:spPr>
           <a:xfrm>
             <a:off x="685800" y="4400640"/>
-            <a:ext cx="5486040" cy="3600000"/>
-          </a:xfrm>
-          <a:prstGeom prst="rect">
-            <a:avLst/>
-          </a:prstGeom>
-          <a:noFill/>
-          <a:ln w="0">
-            <a:noFill/>
-          </a:ln>
-        </p:spPr>
-        <p:txBody>
-          <a:bodyPr anchor="t">
+            <a:ext cx="5485680" cy="3599640"/>
+          </a:xfrm>
+          <a:prstGeom prst="rect">
+            <a:avLst/>
+          </a:prstGeom>
+          <a:noFill/>
+          <a:ln w="0">
+            <a:noFill/>
+          </a:ln>
+        </p:spPr>
+        <p:txBody>
+          <a:bodyPr lIns="0" rIns="0" tIns="0" bIns="0" anchor="t">
             <a:noAutofit/>
           </a:bodyPr>
           <a:p>
@@ -1428,18 +1437,18 @@
         <p:spPr>
           <a:xfrm>
             <a:off x="3884760" y="8685360"/>
-            <a:ext cx="2971440" cy="458280"/>
-          </a:xfrm>
-          <a:prstGeom prst="rect">
-            <a:avLst/>
-          </a:prstGeom>
-          <a:noFill/>
-          <a:ln w="0">
-            <a:noFill/>
-          </a:ln>
-        </p:spPr>
-        <p:txBody>
-          <a:bodyPr anchor="b">
+            <a:ext cx="2971080" cy="457920"/>
+          </a:xfrm>
+          <a:prstGeom prst="rect">
+            <a:avLst/>
+          </a:prstGeom>
+          <a:noFill/>
+          <a:ln w="0">
+            <a:noFill/>
+          </a:ln>
+        </p:spPr>
+        <p:txBody>
+          <a:bodyPr lIns="0" rIns="0" tIns="0" bIns="0" anchor="b">
             <a:noAutofit/>
           </a:bodyPr>
           <a:lstStyle>
@@ -1464,7 +1473,7 @@
               </a:lnSpc>
               <a:buNone/>
             </a:pPr>
-            <a:fld id="{7D59B15E-7B38-4B0D-8C68-55FB8D8DD862}" type="slidenum">
+            <a:fld id="{2B386728-626C-43FB-B400-7A695F1CA8E7}" type="slidenum">
               <a:rPr b="0" lang="en-US" sz="1200" spc="-1" strike="noStrike">
                 <a:solidFill>
                   <a:srgbClr val="000000"/>
@@ -1515,7 +1524,7 @@
         <p:spPr>
           <a:xfrm>
             <a:off x="685800" y="1143000"/>
-            <a:ext cx="5486040" cy="3085920"/>
+            <a:ext cx="5485680" cy="3085560"/>
           </a:xfrm>
           <a:prstGeom prst="rect">
             <a:avLst/>
@@ -1538,18 +1547,18 @@
         <p:spPr>
           <a:xfrm>
             <a:off x="685800" y="4400640"/>
-            <a:ext cx="5486040" cy="3600000"/>
-          </a:xfrm>
-          <a:prstGeom prst="rect">
-            <a:avLst/>
-          </a:prstGeom>
-          <a:noFill/>
-          <a:ln w="0">
-            <a:noFill/>
-          </a:ln>
-        </p:spPr>
-        <p:txBody>
-          <a:bodyPr anchor="t">
+            <a:ext cx="5485680" cy="3599640"/>
+          </a:xfrm>
+          <a:prstGeom prst="rect">
+            <a:avLst/>
+          </a:prstGeom>
+          <a:noFill/>
+          <a:ln w="0">
+            <a:noFill/>
+          </a:ln>
+        </p:spPr>
+        <p:txBody>
+          <a:bodyPr lIns="0" rIns="0" tIns="0" bIns="0" anchor="t">
             <a:noAutofit/>
           </a:bodyPr>
           <a:p>
@@ -1572,18 +1581,18 @@
         <p:spPr>
           <a:xfrm>
             <a:off x="3884760" y="8685360"/>
-            <a:ext cx="2971440" cy="458280"/>
-          </a:xfrm>
-          <a:prstGeom prst="rect">
-            <a:avLst/>
-          </a:prstGeom>
-          <a:noFill/>
-          <a:ln w="0">
-            <a:noFill/>
-          </a:ln>
-        </p:spPr>
-        <p:txBody>
-          <a:bodyPr anchor="b">
+            <a:ext cx="2971080" cy="457920"/>
+          </a:xfrm>
+          <a:prstGeom prst="rect">
+            <a:avLst/>
+          </a:prstGeom>
+          <a:noFill/>
+          <a:ln w="0">
+            <a:noFill/>
+          </a:ln>
+        </p:spPr>
+        <p:txBody>
+          <a:bodyPr lIns="0" rIns="0" tIns="0" bIns="0" anchor="b">
             <a:noAutofit/>
           </a:bodyPr>
           <a:lstStyle>
@@ -1608,7 +1617,7 @@
               </a:lnSpc>
               <a:buNone/>
             </a:pPr>
-            <a:fld id="{2740D980-7DD2-4C00-93AB-C6EDAC4BEB5B}" type="slidenum">
+            <a:fld id="{5E89013F-E55D-4AC0-95F1-EC83CCE70EA1}" type="slidenum">
               <a:rPr b="0" lang="en-US" sz="1200" spc="-1" strike="noStrike">
                 <a:solidFill>
                   <a:srgbClr val="000000"/>
@@ -1659,7 +1668,7 @@
         <p:spPr>
           <a:xfrm>
             <a:off x="685800" y="1143000"/>
-            <a:ext cx="5486040" cy="3085920"/>
+            <a:ext cx="5485680" cy="3085560"/>
           </a:xfrm>
           <a:prstGeom prst="rect">
             <a:avLst/>
@@ -1682,18 +1691,18 @@
         <p:spPr>
           <a:xfrm>
             <a:off x="685800" y="4400640"/>
-            <a:ext cx="5486040" cy="3600000"/>
-          </a:xfrm>
-          <a:prstGeom prst="rect">
-            <a:avLst/>
-          </a:prstGeom>
-          <a:noFill/>
-          <a:ln w="0">
-            <a:noFill/>
-          </a:ln>
-        </p:spPr>
-        <p:txBody>
-          <a:bodyPr anchor="t">
+            <a:ext cx="5485680" cy="3599640"/>
+          </a:xfrm>
+          <a:prstGeom prst="rect">
+            <a:avLst/>
+          </a:prstGeom>
+          <a:noFill/>
+          <a:ln w="0">
+            <a:noFill/>
+          </a:ln>
+        </p:spPr>
+        <p:txBody>
+          <a:bodyPr lIns="0" rIns="0" tIns="0" bIns="0" anchor="t">
             <a:noAutofit/>
           </a:bodyPr>
           <a:p>
@@ -1716,18 +1725,18 @@
         <p:spPr>
           <a:xfrm>
             <a:off x="3884760" y="8685360"/>
-            <a:ext cx="2971440" cy="458280"/>
-          </a:xfrm>
-          <a:prstGeom prst="rect">
-            <a:avLst/>
-          </a:prstGeom>
-          <a:noFill/>
-          <a:ln w="0">
-            <a:noFill/>
-          </a:ln>
-        </p:spPr>
-        <p:txBody>
-          <a:bodyPr anchor="b">
+            <a:ext cx="2971080" cy="457920"/>
+          </a:xfrm>
+          <a:prstGeom prst="rect">
+            <a:avLst/>
+          </a:prstGeom>
+          <a:noFill/>
+          <a:ln w="0">
+            <a:noFill/>
+          </a:ln>
+        </p:spPr>
+        <p:txBody>
+          <a:bodyPr lIns="0" rIns="0" tIns="0" bIns="0" anchor="b">
             <a:noAutofit/>
           </a:bodyPr>
           <a:lstStyle>
@@ -1752,7 +1761,7 @@
               </a:lnSpc>
               <a:buNone/>
             </a:pPr>
-            <a:fld id="{1C7D853B-2C0E-437E-9C00-1723978700CC}" type="slidenum">
+            <a:fld id="{416B6425-6217-423F-9D07-EA0CCB9D8455}" type="slidenum">
               <a:rPr b="0" lang="en-US" sz="1200" spc="-1" strike="noStrike">
                 <a:solidFill>
                   <a:srgbClr val="000000"/>
@@ -1803,7 +1812,7 @@
         <p:spPr>
           <a:xfrm>
             <a:off x="685800" y="1143000"/>
-            <a:ext cx="5486040" cy="3085920"/>
+            <a:ext cx="5485680" cy="3085560"/>
           </a:xfrm>
           <a:prstGeom prst="rect">
             <a:avLst/>
@@ -1826,18 +1835,18 @@
         <p:spPr>
           <a:xfrm>
             <a:off x="685800" y="4400640"/>
-            <a:ext cx="5486040" cy="3600000"/>
-          </a:xfrm>
-          <a:prstGeom prst="rect">
-            <a:avLst/>
-          </a:prstGeom>
-          <a:noFill/>
-          <a:ln w="0">
-            <a:noFill/>
-          </a:ln>
-        </p:spPr>
-        <p:txBody>
-          <a:bodyPr anchor="t">
+            <a:ext cx="5485680" cy="3599640"/>
+          </a:xfrm>
+          <a:prstGeom prst="rect">
+            <a:avLst/>
+          </a:prstGeom>
+          <a:noFill/>
+          <a:ln w="0">
+            <a:noFill/>
+          </a:ln>
+        </p:spPr>
+        <p:txBody>
+          <a:bodyPr lIns="0" rIns="0" tIns="0" bIns="0" anchor="t">
             <a:noAutofit/>
           </a:bodyPr>
           <a:p>
@@ -1860,18 +1869,18 @@
         <p:spPr>
           <a:xfrm>
             <a:off x="3884760" y="8685360"/>
-            <a:ext cx="2971440" cy="458280"/>
-          </a:xfrm>
-          <a:prstGeom prst="rect">
-            <a:avLst/>
-          </a:prstGeom>
-          <a:noFill/>
-          <a:ln w="0">
-            <a:noFill/>
-          </a:ln>
-        </p:spPr>
-        <p:txBody>
-          <a:bodyPr anchor="b">
+            <a:ext cx="2971080" cy="457920"/>
+          </a:xfrm>
+          <a:prstGeom prst="rect">
+            <a:avLst/>
+          </a:prstGeom>
+          <a:noFill/>
+          <a:ln w="0">
+            <a:noFill/>
+          </a:ln>
+        </p:spPr>
+        <p:txBody>
+          <a:bodyPr lIns="0" rIns="0" tIns="0" bIns="0" anchor="b">
             <a:noAutofit/>
           </a:bodyPr>
           <a:lstStyle>
@@ -1896,7 +1905,7 @@
               </a:lnSpc>
               <a:buNone/>
             </a:pPr>
-            <a:fld id="{4CAFB69F-5708-4E66-8D93-3FBD5DF13E25}" type="slidenum">
+            <a:fld id="{64F113DF-A3B0-4AE4-AD53-C929993DF635}" type="slidenum">
               <a:rPr b="0" lang="en-US" sz="1200" spc="-1" strike="noStrike">
                 <a:solidFill>
                   <a:srgbClr val="000000"/>
@@ -1947,7 +1956,7 @@
         <p:spPr>
           <a:xfrm>
             <a:off x="685800" y="1143000"/>
-            <a:ext cx="5486040" cy="3085920"/>
+            <a:ext cx="5485680" cy="3085560"/>
           </a:xfrm>
           <a:prstGeom prst="rect">
             <a:avLst/>
@@ -1970,18 +1979,18 @@
         <p:spPr>
           <a:xfrm>
             <a:off x="685800" y="4400640"/>
-            <a:ext cx="5486040" cy="3600000"/>
-          </a:xfrm>
-          <a:prstGeom prst="rect">
-            <a:avLst/>
-          </a:prstGeom>
-          <a:noFill/>
-          <a:ln w="0">
-            <a:noFill/>
-          </a:ln>
-        </p:spPr>
-        <p:txBody>
-          <a:bodyPr anchor="t">
+            <a:ext cx="5485680" cy="3599640"/>
+          </a:xfrm>
+          <a:prstGeom prst="rect">
+            <a:avLst/>
+          </a:prstGeom>
+          <a:noFill/>
+          <a:ln w="0">
+            <a:noFill/>
+          </a:ln>
+        </p:spPr>
+        <p:txBody>
+          <a:bodyPr lIns="0" rIns="0" tIns="0" bIns="0" anchor="t">
             <a:noAutofit/>
           </a:bodyPr>
           <a:p>
@@ -2004,18 +2013,18 @@
         <p:spPr>
           <a:xfrm>
             <a:off x="3884760" y="8685360"/>
-            <a:ext cx="2971440" cy="458280"/>
-          </a:xfrm>
-          <a:prstGeom prst="rect">
-            <a:avLst/>
-          </a:prstGeom>
-          <a:noFill/>
-          <a:ln w="0">
-            <a:noFill/>
-          </a:ln>
-        </p:spPr>
-        <p:txBody>
-          <a:bodyPr anchor="b">
+            <a:ext cx="2971080" cy="457920"/>
+          </a:xfrm>
+          <a:prstGeom prst="rect">
+            <a:avLst/>
+          </a:prstGeom>
+          <a:noFill/>
+          <a:ln w="0">
+            <a:noFill/>
+          </a:ln>
+        </p:spPr>
+        <p:txBody>
+          <a:bodyPr lIns="0" rIns="0" tIns="0" bIns="0" anchor="b">
             <a:noAutofit/>
           </a:bodyPr>
           <a:lstStyle>
@@ -2040,7 +2049,7 @@
               </a:lnSpc>
               <a:buNone/>
             </a:pPr>
-            <a:fld id="{B9968ADF-5CB2-4798-94F0-935335E2372B}" type="slidenum">
+            <a:fld id="{FA070908-6356-4C94-A554-9B9ED3967423}" type="slidenum">
               <a:rPr b="0" lang="en-US" sz="1200" spc="-1" strike="noStrike">
                 <a:solidFill>
                   <a:srgbClr val="000000"/>
@@ -2091,7 +2100,7 @@
         <p:spPr>
           <a:xfrm>
             <a:off x="685800" y="1143000"/>
-            <a:ext cx="5486040" cy="3085920"/>
+            <a:ext cx="5485680" cy="3085560"/>
           </a:xfrm>
           <a:prstGeom prst="rect">
             <a:avLst/>
@@ -2114,18 +2123,18 @@
         <p:spPr>
           <a:xfrm>
             <a:off x="685800" y="4400640"/>
-            <a:ext cx="5486040" cy="3600000"/>
-          </a:xfrm>
-          <a:prstGeom prst="rect">
-            <a:avLst/>
-          </a:prstGeom>
-          <a:noFill/>
-          <a:ln w="0">
-            <a:noFill/>
-          </a:ln>
-        </p:spPr>
-        <p:txBody>
-          <a:bodyPr anchor="t">
+            <a:ext cx="5485680" cy="3599640"/>
+          </a:xfrm>
+          <a:prstGeom prst="rect">
+            <a:avLst/>
+          </a:prstGeom>
+          <a:noFill/>
+          <a:ln w="0">
+            <a:noFill/>
+          </a:ln>
+        </p:spPr>
+        <p:txBody>
+          <a:bodyPr lIns="0" rIns="0" tIns="0" bIns="0" anchor="t">
             <a:noAutofit/>
           </a:bodyPr>
           <a:p>
@@ -2148,18 +2157,18 @@
         <p:spPr>
           <a:xfrm>
             <a:off x="3884760" y="8685360"/>
-            <a:ext cx="2971440" cy="458280"/>
-          </a:xfrm>
-          <a:prstGeom prst="rect">
-            <a:avLst/>
-          </a:prstGeom>
-          <a:noFill/>
-          <a:ln w="0">
-            <a:noFill/>
-          </a:ln>
-        </p:spPr>
-        <p:txBody>
-          <a:bodyPr anchor="b">
+            <a:ext cx="2971080" cy="457920"/>
+          </a:xfrm>
+          <a:prstGeom prst="rect">
+            <a:avLst/>
+          </a:prstGeom>
+          <a:noFill/>
+          <a:ln w="0">
+            <a:noFill/>
+          </a:ln>
+        </p:spPr>
+        <p:txBody>
+          <a:bodyPr lIns="0" rIns="0" tIns="0" bIns="0" anchor="b">
             <a:noAutofit/>
           </a:bodyPr>
           <a:lstStyle>
@@ -2184,7 +2193,7 @@
               </a:lnSpc>
               <a:buNone/>
             </a:pPr>
-            <a:fld id="{B2EF820B-6599-423C-9058-EBB525BA3E0C}" type="slidenum">
+            <a:fld id="{1BA61F09-E749-4C22-A294-626BC7C70561}" type="slidenum">
               <a:rPr b="0" lang="en-US" sz="1200" spc="-1" strike="noStrike">
                 <a:solidFill>
                   <a:srgbClr val="000000"/>
@@ -2235,7 +2244,7 @@
         <p:spPr>
           <a:xfrm>
             <a:off x="685800" y="1143000"/>
-            <a:ext cx="5486040" cy="3085920"/>
+            <a:ext cx="5485680" cy="3085560"/>
           </a:xfrm>
           <a:prstGeom prst="rect">
             <a:avLst/>
@@ -2258,18 +2267,18 @@
         <p:spPr>
           <a:xfrm>
             <a:off x="685800" y="4400640"/>
-            <a:ext cx="5486040" cy="3600000"/>
-          </a:xfrm>
-          <a:prstGeom prst="rect">
-            <a:avLst/>
-          </a:prstGeom>
-          <a:noFill/>
-          <a:ln w="0">
-            <a:noFill/>
-          </a:ln>
-        </p:spPr>
-        <p:txBody>
-          <a:bodyPr anchor="t">
+            <a:ext cx="5485680" cy="3599640"/>
+          </a:xfrm>
+          <a:prstGeom prst="rect">
+            <a:avLst/>
+          </a:prstGeom>
+          <a:noFill/>
+          <a:ln w="0">
+            <a:noFill/>
+          </a:ln>
+        </p:spPr>
+        <p:txBody>
+          <a:bodyPr lIns="0" rIns="0" tIns="0" bIns="0" anchor="t">
             <a:noAutofit/>
           </a:bodyPr>
           <a:p>
@@ -2292,18 +2301,18 @@
         <p:spPr>
           <a:xfrm>
             <a:off x="3884760" y="8685360"/>
-            <a:ext cx="2971440" cy="458280"/>
-          </a:xfrm>
-          <a:prstGeom prst="rect">
-            <a:avLst/>
-          </a:prstGeom>
-          <a:noFill/>
-          <a:ln w="0">
-            <a:noFill/>
-          </a:ln>
-        </p:spPr>
-        <p:txBody>
-          <a:bodyPr anchor="b">
+            <a:ext cx="2971080" cy="457920"/>
+          </a:xfrm>
+          <a:prstGeom prst="rect">
+            <a:avLst/>
+          </a:prstGeom>
+          <a:noFill/>
+          <a:ln w="0">
+            <a:noFill/>
+          </a:ln>
+        </p:spPr>
+        <p:txBody>
+          <a:bodyPr lIns="0" rIns="0" tIns="0" bIns="0" anchor="b">
             <a:noAutofit/>
           </a:bodyPr>
           <a:lstStyle>
@@ -2328,7 +2337,7 @@
               </a:lnSpc>
               <a:buNone/>
             </a:pPr>
-            <a:fld id="{E604266C-36DB-49B9-8C06-05207A0D8F35}" type="slidenum">
+            <a:fld id="{3B47C8A7-1F06-4604-9EBB-B2BE79593A81}" type="slidenum">
               <a:rPr b="0" lang="en-US" sz="1200" spc="-1" strike="noStrike">
                 <a:solidFill>
                   <a:srgbClr val="000000"/>
@@ -2379,7 +2388,7 @@
         <p:spPr>
           <a:xfrm>
             <a:off x="685800" y="1143000"/>
-            <a:ext cx="5486040" cy="3085920"/>
+            <a:ext cx="5485680" cy="3085560"/>
           </a:xfrm>
           <a:prstGeom prst="rect">
             <a:avLst/>
@@ -2402,18 +2411,18 @@
         <p:spPr>
           <a:xfrm>
             <a:off x="685800" y="4400640"/>
-            <a:ext cx="5486040" cy="3600000"/>
-          </a:xfrm>
-          <a:prstGeom prst="rect">
-            <a:avLst/>
-          </a:prstGeom>
-          <a:noFill/>
-          <a:ln w="0">
-            <a:noFill/>
-          </a:ln>
-        </p:spPr>
-        <p:txBody>
-          <a:bodyPr anchor="t">
+            <a:ext cx="5485680" cy="3599640"/>
+          </a:xfrm>
+          <a:prstGeom prst="rect">
+            <a:avLst/>
+          </a:prstGeom>
+          <a:noFill/>
+          <a:ln w="0">
+            <a:noFill/>
+          </a:ln>
+        </p:spPr>
+        <p:txBody>
+          <a:bodyPr lIns="0" rIns="0" tIns="0" bIns="0" anchor="t">
             <a:noAutofit/>
           </a:bodyPr>
           <a:p>
@@ -2436,18 +2445,18 @@
         <p:spPr>
           <a:xfrm>
             <a:off x="3884760" y="8685360"/>
-            <a:ext cx="2971440" cy="458280"/>
-          </a:xfrm>
-          <a:prstGeom prst="rect">
-            <a:avLst/>
-          </a:prstGeom>
-          <a:noFill/>
-          <a:ln w="0">
-            <a:noFill/>
-          </a:ln>
-        </p:spPr>
-        <p:txBody>
-          <a:bodyPr anchor="b">
+            <a:ext cx="2971080" cy="457920"/>
+          </a:xfrm>
+          <a:prstGeom prst="rect">
+            <a:avLst/>
+          </a:prstGeom>
+          <a:noFill/>
+          <a:ln w="0">
+            <a:noFill/>
+          </a:ln>
+        </p:spPr>
+        <p:txBody>
+          <a:bodyPr lIns="0" rIns="0" tIns="0" bIns="0" anchor="b">
             <a:noAutofit/>
           </a:bodyPr>
           <a:lstStyle>
@@ -2472,7 +2481,7 @@
               </a:lnSpc>
               <a:buNone/>
             </a:pPr>
-            <a:fld id="{5752679B-B15F-45C8-9523-155E1F1A652C}" type="slidenum">
+            <a:fld id="{8B3DEAA6-D099-42C2-86C2-FA23684DA704}" type="slidenum">
               <a:rPr b="0" lang="en-US" sz="1200" spc="-1" strike="noStrike">
                 <a:solidFill>
                   <a:srgbClr val="000000"/>
@@ -2560,11 +2569,11 @@
             <a:noAutofit/>
           </a:bodyPr>
           <a:p>
-            <a:endParaRPr b="0" lang="en-IN" sz="1800" spc="-1" strike="noStrike">
-              <a:solidFill>
-                <a:srgbClr val="000000"/>
-              </a:solidFill>
-              <a:latin typeface="Calibri"/>
+            <a:pPr algn="ctr">
+              <a:buNone/>
+            </a:pPr>
+            <a:endParaRPr b="0" lang="en-IN" sz="4400" spc="-1" strike="noStrike">
+              <a:latin typeface="Arial"/>
             </a:endParaRPr>
           </a:p>
         </p:txBody>
@@ -2598,10 +2607,7 @@
           </a:bodyPr>
           <a:p>
             <a:endParaRPr b="0" lang="en-IN" sz="3200" spc="-1" strike="noStrike">
-              <a:solidFill>
-                <a:srgbClr val="000000"/>
-              </a:solidFill>
-              <a:latin typeface="Calibri"/>
+              <a:latin typeface="Arial"/>
             </a:endParaRPr>
           </a:p>
         </p:txBody>
@@ -2635,10 +2641,7 @@
           </a:bodyPr>
           <a:p>
             <a:endParaRPr b="0" lang="en-IN" sz="3200" spc="-1" strike="noStrike">
-              <a:solidFill>
-                <a:srgbClr val="000000"/>
-              </a:solidFill>
-              <a:latin typeface="Calibri"/>
+              <a:latin typeface="Arial"/>
             </a:endParaRPr>
           </a:p>
         </p:txBody>
@@ -2693,11 +2696,11 @@
             <a:noAutofit/>
           </a:bodyPr>
           <a:p>
-            <a:endParaRPr b="0" lang="en-IN" sz="1800" spc="-1" strike="noStrike">
-              <a:solidFill>
-                <a:srgbClr val="000000"/>
-              </a:solidFill>
-              <a:latin typeface="Calibri"/>
+            <a:pPr algn="ctr">
+              <a:buNone/>
+            </a:pPr>
+            <a:endParaRPr b="0" lang="en-IN" sz="4400" spc="-1" strike="noStrike">
+              <a:latin typeface="Arial"/>
             </a:endParaRPr>
           </a:p>
         </p:txBody>
@@ -2731,10 +2734,7 @@
           </a:bodyPr>
           <a:p>
             <a:endParaRPr b="0" lang="en-IN" sz="3200" spc="-1" strike="noStrike">
-              <a:solidFill>
-                <a:srgbClr val="000000"/>
-              </a:solidFill>
-              <a:latin typeface="Calibri"/>
+              <a:latin typeface="Arial"/>
             </a:endParaRPr>
           </a:p>
         </p:txBody>
@@ -2768,10 +2768,7 @@
           </a:bodyPr>
           <a:p>
             <a:endParaRPr b="0" lang="en-IN" sz="3200" spc="-1" strike="noStrike">
-              <a:solidFill>
-                <a:srgbClr val="000000"/>
-              </a:solidFill>
-              <a:latin typeface="Calibri"/>
+              <a:latin typeface="Arial"/>
             </a:endParaRPr>
           </a:p>
         </p:txBody>
@@ -2805,10 +2802,7 @@
           </a:bodyPr>
           <a:p>
             <a:endParaRPr b="0" lang="en-IN" sz="3200" spc="-1" strike="noStrike">
-              <a:solidFill>
-                <a:srgbClr val="000000"/>
-              </a:solidFill>
-              <a:latin typeface="Calibri"/>
+              <a:latin typeface="Arial"/>
             </a:endParaRPr>
           </a:p>
         </p:txBody>
@@ -2842,10 +2836,7 @@
           </a:bodyPr>
           <a:p>
             <a:endParaRPr b="0" lang="en-IN" sz="3200" spc="-1" strike="noStrike">
-              <a:solidFill>
-                <a:srgbClr val="000000"/>
-              </a:solidFill>
-              <a:latin typeface="Calibri"/>
+              <a:latin typeface="Arial"/>
             </a:endParaRPr>
           </a:p>
         </p:txBody>
@@ -2900,11 +2891,11 @@
             <a:noAutofit/>
           </a:bodyPr>
           <a:p>
-            <a:endParaRPr b="0" lang="en-IN" sz="1800" spc="-1" strike="noStrike">
-              <a:solidFill>
-                <a:srgbClr val="000000"/>
-              </a:solidFill>
-              <a:latin typeface="Calibri"/>
+            <a:pPr algn="ctr">
+              <a:buNone/>
+            </a:pPr>
+            <a:endParaRPr b="0" lang="en-IN" sz="4400" spc="-1" strike="noStrike">
+              <a:latin typeface="Arial"/>
             </a:endParaRPr>
           </a:p>
         </p:txBody>
@@ -2938,10 +2929,7 @@
           </a:bodyPr>
           <a:p>
             <a:endParaRPr b="0" lang="en-IN" sz="3200" spc="-1" strike="noStrike">
-              <a:solidFill>
-                <a:srgbClr val="000000"/>
-              </a:solidFill>
-              <a:latin typeface="Calibri"/>
+              <a:latin typeface="Arial"/>
             </a:endParaRPr>
           </a:p>
         </p:txBody>
@@ -2975,10 +2963,7 @@
           </a:bodyPr>
           <a:p>
             <a:endParaRPr b="0" lang="en-IN" sz="3200" spc="-1" strike="noStrike">
-              <a:solidFill>
-                <a:srgbClr val="000000"/>
-              </a:solidFill>
-              <a:latin typeface="Calibri"/>
+              <a:latin typeface="Arial"/>
             </a:endParaRPr>
           </a:p>
         </p:txBody>
@@ -3012,10 +2997,7 @@
           </a:bodyPr>
           <a:p>
             <a:endParaRPr b="0" lang="en-IN" sz="3200" spc="-1" strike="noStrike">
-              <a:solidFill>
-                <a:srgbClr val="000000"/>
-              </a:solidFill>
-              <a:latin typeface="Calibri"/>
+              <a:latin typeface="Arial"/>
             </a:endParaRPr>
           </a:p>
         </p:txBody>
@@ -3049,10 +3031,7 @@
           </a:bodyPr>
           <a:p>
             <a:endParaRPr b="0" lang="en-IN" sz="3200" spc="-1" strike="noStrike">
-              <a:solidFill>
-                <a:srgbClr val="000000"/>
-              </a:solidFill>
-              <a:latin typeface="Calibri"/>
+              <a:latin typeface="Arial"/>
             </a:endParaRPr>
           </a:p>
         </p:txBody>
@@ -3086,10 +3065,7 @@
           </a:bodyPr>
           <a:p>
             <a:endParaRPr b="0" lang="en-IN" sz="3200" spc="-1" strike="noStrike">
-              <a:solidFill>
-                <a:srgbClr val="000000"/>
-              </a:solidFill>
-              <a:latin typeface="Calibri"/>
+              <a:latin typeface="Arial"/>
             </a:endParaRPr>
           </a:p>
         </p:txBody>
@@ -3123,10 +3099,7 @@
           </a:bodyPr>
           <a:p>
             <a:endParaRPr b="0" lang="en-IN" sz="3200" spc="-1" strike="noStrike">
-              <a:solidFill>
-                <a:srgbClr val="000000"/>
-              </a:solidFill>
-              <a:latin typeface="Calibri"/>
+              <a:latin typeface="Arial"/>
             </a:endParaRPr>
           </a:p>
         </p:txBody>
@@ -3181,11 +3154,11 @@
             <a:noAutofit/>
           </a:bodyPr>
           <a:p>
-            <a:endParaRPr b="0" lang="en-IN" sz="1800" spc="-1" strike="noStrike">
-              <a:solidFill>
-                <a:srgbClr val="000000"/>
-              </a:solidFill>
-              <a:latin typeface="Calibri"/>
+            <a:pPr algn="ctr">
+              <a:buNone/>
+            </a:pPr>
+            <a:endParaRPr b="0" lang="en-IN" sz="4400" spc="-1" strike="noStrike">
+              <a:latin typeface="Arial"/>
             </a:endParaRPr>
           </a:p>
         </p:txBody>
@@ -3277,11 +3250,11 @@
             <a:noAutofit/>
           </a:bodyPr>
           <a:p>
-            <a:endParaRPr b="0" lang="en-IN" sz="1800" spc="-1" strike="noStrike">
-              <a:solidFill>
-                <a:srgbClr val="000000"/>
-              </a:solidFill>
-              <a:latin typeface="Calibri"/>
+            <a:pPr algn="ctr">
+              <a:buNone/>
+            </a:pPr>
+            <a:endParaRPr b="0" lang="en-IN" sz="4400" spc="-1" strike="noStrike">
+              <a:latin typeface="Arial"/>
             </a:endParaRPr>
           </a:p>
         </p:txBody>
@@ -3315,10 +3288,7 @@
           </a:bodyPr>
           <a:p>
             <a:endParaRPr b="0" lang="en-IN" sz="3200" spc="-1" strike="noStrike">
-              <a:solidFill>
-                <a:srgbClr val="000000"/>
-              </a:solidFill>
-              <a:latin typeface="Calibri"/>
+              <a:latin typeface="Arial"/>
             </a:endParaRPr>
           </a:p>
         </p:txBody>
@@ -3373,11 +3343,11 @@
             <a:noAutofit/>
           </a:bodyPr>
           <a:p>
-            <a:endParaRPr b="0" lang="en-IN" sz="1800" spc="-1" strike="noStrike">
-              <a:solidFill>
-                <a:srgbClr val="000000"/>
-              </a:solidFill>
-              <a:latin typeface="Calibri"/>
+            <a:pPr algn="ctr">
+              <a:buNone/>
+            </a:pPr>
+            <a:endParaRPr b="0" lang="en-IN" sz="4400" spc="-1" strike="noStrike">
+              <a:latin typeface="Arial"/>
             </a:endParaRPr>
           </a:p>
         </p:txBody>
@@ -3411,10 +3381,7 @@
           </a:bodyPr>
           <a:p>
             <a:endParaRPr b="0" lang="en-IN" sz="3200" spc="-1" strike="noStrike">
-              <a:solidFill>
-                <a:srgbClr val="000000"/>
-              </a:solidFill>
-              <a:latin typeface="Calibri"/>
+              <a:latin typeface="Arial"/>
             </a:endParaRPr>
           </a:p>
         </p:txBody>
@@ -3448,10 +3415,7 @@
           </a:bodyPr>
           <a:p>
             <a:endParaRPr b="0" lang="en-IN" sz="3200" spc="-1" strike="noStrike">
-              <a:solidFill>
-                <a:srgbClr val="000000"/>
-              </a:solidFill>
-              <a:latin typeface="Calibri"/>
+              <a:latin typeface="Arial"/>
             </a:endParaRPr>
           </a:p>
         </p:txBody>
@@ -3506,11 +3470,11 @@
             <a:noAutofit/>
           </a:bodyPr>
           <a:p>
-            <a:endParaRPr b="0" lang="en-IN" sz="1800" spc="-1" strike="noStrike">
-              <a:solidFill>
-                <a:srgbClr val="000000"/>
-              </a:solidFill>
-              <a:latin typeface="Calibri"/>
+            <a:pPr algn="ctr">
+              <a:buNone/>
+            </a:pPr>
+            <a:endParaRPr b="0" lang="en-IN" sz="4400" spc="-1" strike="noStrike">
+              <a:latin typeface="Arial"/>
             </a:endParaRPr>
           </a:p>
         </p:txBody>
@@ -3624,11 +3588,11 @@
             <a:noAutofit/>
           </a:bodyPr>
           <a:p>
-            <a:endParaRPr b="0" lang="en-IN" sz="1800" spc="-1" strike="noStrike">
-              <a:solidFill>
-                <a:srgbClr val="000000"/>
-              </a:solidFill>
-              <a:latin typeface="Calibri"/>
+            <a:pPr algn="ctr">
+              <a:buNone/>
+            </a:pPr>
+            <a:endParaRPr b="0" lang="en-IN" sz="4400" spc="-1" strike="noStrike">
+              <a:latin typeface="Arial"/>
             </a:endParaRPr>
           </a:p>
         </p:txBody>
@@ -3662,10 +3626,7 @@
           </a:bodyPr>
           <a:p>
             <a:endParaRPr b="0" lang="en-IN" sz="3200" spc="-1" strike="noStrike">
-              <a:solidFill>
-                <a:srgbClr val="000000"/>
-              </a:solidFill>
-              <a:latin typeface="Calibri"/>
+              <a:latin typeface="Arial"/>
             </a:endParaRPr>
           </a:p>
         </p:txBody>
@@ -3699,10 +3660,7 @@
           </a:bodyPr>
           <a:p>
             <a:endParaRPr b="0" lang="en-IN" sz="3200" spc="-1" strike="noStrike">
-              <a:solidFill>
-                <a:srgbClr val="000000"/>
-              </a:solidFill>
-              <a:latin typeface="Calibri"/>
+              <a:latin typeface="Arial"/>
             </a:endParaRPr>
           </a:p>
         </p:txBody>
@@ -3736,10 +3694,7 @@
           </a:bodyPr>
           <a:p>
             <a:endParaRPr b="0" lang="en-IN" sz="3200" spc="-1" strike="noStrike">
-              <a:solidFill>
-                <a:srgbClr val="000000"/>
-              </a:solidFill>
-              <a:latin typeface="Calibri"/>
+              <a:latin typeface="Arial"/>
             </a:endParaRPr>
           </a:p>
         </p:txBody>
@@ -3794,11 +3749,11 @@
             <a:noAutofit/>
           </a:bodyPr>
           <a:p>
-            <a:endParaRPr b="0" lang="en-IN" sz="1800" spc="-1" strike="noStrike">
-              <a:solidFill>
-                <a:srgbClr val="000000"/>
-              </a:solidFill>
-              <a:latin typeface="Calibri"/>
+            <a:pPr algn="ctr">
+              <a:buNone/>
+            </a:pPr>
+            <a:endParaRPr b="0" lang="en-IN" sz="4400" spc="-1" strike="noStrike">
+              <a:latin typeface="Arial"/>
             </a:endParaRPr>
           </a:p>
         </p:txBody>
@@ -3832,10 +3787,7 @@
           </a:bodyPr>
           <a:p>
             <a:endParaRPr b="0" lang="en-IN" sz="3200" spc="-1" strike="noStrike">
-              <a:solidFill>
-                <a:srgbClr val="000000"/>
-              </a:solidFill>
-              <a:latin typeface="Calibri"/>
+              <a:latin typeface="Arial"/>
             </a:endParaRPr>
           </a:p>
         </p:txBody>
@@ -3869,10 +3821,7 @@
           </a:bodyPr>
           <a:p>
             <a:endParaRPr b="0" lang="en-IN" sz="3200" spc="-1" strike="noStrike">
-              <a:solidFill>
-                <a:srgbClr val="000000"/>
-              </a:solidFill>
-              <a:latin typeface="Calibri"/>
+              <a:latin typeface="Arial"/>
             </a:endParaRPr>
           </a:p>
         </p:txBody>
@@ -3906,10 +3855,7 @@
           </a:bodyPr>
           <a:p>
             <a:endParaRPr b="0" lang="en-IN" sz="3200" spc="-1" strike="noStrike">
-              <a:solidFill>
-                <a:srgbClr val="000000"/>
-              </a:solidFill>
-              <a:latin typeface="Calibri"/>
+              <a:latin typeface="Arial"/>
             </a:endParaRPr>
           </a:p>
         </p:txBody>
@@ -3964,11 +3910,11 @@
             <a:noAutofit/>
           </a:bodyPr>
           <a:p>
-            <a:endParaRPr b="0" lang="en-IN" sz="1800" spc="-1" strike="noStrike">
-              <a:solidFill>
-                <a:srgbClr val="000000"/>
-              </a:solidFill>
-              <a:latin typeface="Calibri"/>
+            <a:pPr algn="ctr">
+              <a:buNone/>
+            </a:pPr>
+            <a:endParaRPr b="0" lang="en-IN" sz="4400" spc="-1" strike="noStrike">
+              <a:latin typeface="Arial"/>
             </a:endParaRPr>
           </a:p>
         </p:txBody>
@@ -4002,10 +3948,7 @@
           </a:bodyPr>
           <a:p>
             <a:endParaRPr b="0" lang="en-IN" sz="3200" spc="-1" strike="noStrike">
-              <a:solidFill>
-                <a:srgbClr val="000000"/>
-              </a:solidFill>
-              <a:latin typeface="Calibri"/>
+              <a:latin typeface="Arial"/>
             </a:endParaRPr>
           </a:p>
         </p:txBody>
@@ -4039,10 +3982,7 @@
           </a:bodyPr>
           <a:p>
             <a:endParaRPr b="0" lang="en-IN" sz="3200" spc="-1" strike="noStrike">
-              <a:solidFill>
-                <a:srgbClr val="000000"/>
-              </a:solidFill>
-              <a:latin typeface="Calibri"/>
+              <a:latin typeface="Arial"/>
             </a:endParaRPr>
           </a:p>
         </p:txBody>
@@ -4076,10 +4016,7 @@
           </a:bodyPr>
           <a:p>
             <a:endParaRPr b="0" lang="en-IN" sz="3200" spc="-1" strike="noStrike">
-              <a:solidFill>
-                <a:srgbClr val="000000"/>
-              </a:solidFill>
-              <a:latin typeface="Calibri"/>
+              <a:latin typeface="Arial"/>
             </a:endParaRPr>
           </a:p>
         </p:txBody>
@@ -4141,20 +4078,35 @@
             <a:noAutofit/>
           </a:bodyPr>
           <a:p>
-            <a:r>
-              <a:rPr b="0" lang="en-IN" sz="1800" spc="-1" strike="noStrike">
-                <a:solidFill>
-                  <a:srgbClr val="000000"/>
-                </a:solidFill>
-                <a:latin typeface="Calibri"/>
-              </a:rPr>
-              <a:t>Click to edit the title text format</a:t>
-            </a:r>
-            <a:endParaRPr b="0" lang="en-IN" sz="1800" spc="-1" strike="noStrike">
-              <a:solidFill>
-                <a:srgbClr val="000000"/>
-              </a:solidFill>
-              <a:latin typeface="Calibri"/>
+            <a:pPr algn="ctr">
+              <a:buNone/>
+            </a:pPr>
+            <a:r>
+              <a:rPr b="0" lang="en-IN" sz="4400" spc="-1" strike="noStrike">
+                <a:latin typeface="Arial"/>
+              </a:rPr>
+              <a:t>Click to </a:t>
+            </a:r>
+            <a:r>
+              <a:rPr b="0" lang="en-IN" sz="4400" spc="-1" strike="noStrike">
+                <a:latin typeface="Arial"/>
+              </a:rPr>
+              <a:t>edit the </a:t>
+            </a:r>
+            <a:r>
+              <a:rPr b="0" lang="en-IN" sz="4400" spc="-1" strike="noStrike">
+                <a:latin typeface="Arial"/>
+              </a:rPr>
+              <a:t>title text </a:t>
+            </a:r>
+            <a:r>
+              <a:rPr b="0" lang="en-IN" sz="4400" spc="-1" strike="noStrike">
+                <a:latin typeface="Arial"/>
+              </a:rPr>
+              <a:t>format</a:t>
+            </a:r>
+            <a:endParaRPr b="0" lang="en-IN" sz="4400" spc="-1" strike="noStrike">
+              <a:latin typeface="Arial"/>
             </a:endParaRPr>
           </a:p>
         </p:txBody>
@@ -4200,18 +4152,12 @@
             </a:pPr>
             <a:r>
               <a:rPr b="0" lang="en-IN" sz="3200" spc="-1" strike="noStrike">
-                <a:solidFill>
-                  <a:srgbClr val="000000"/>
-                </a:solidFill>
-                <a:latin typeface="Calibri"/>
+                <a:latin typeface="Arial"/>
               </a:rPr>
               <a:t>Click to edit the outline text format</a:t>
             </a:r>
             <a:endParaRPr b="0" lang="en-IN" sz="3200" spc="-1" strike="noStrike">
-              <a:solidFill>
-                <a:srgbClr val="000000"/>
-              </a:solidFill>
-              <a:latin typeface="Calibri"/>
+              <a:latin typeface="Arial"/>
             </a:endParaRPr>
           </a:p>
           <a:p>
@@ -4227,19 +4173,13 @@
               <a:buChar char=""/>
             </a:pPr>
             <a:r>
-              <a:rPr b="0" lang="en-IN" sz="2400" spc="-1" strike="noStrike">
-                <a:solidFill>
-                  <a:srgbClr val="000000"/>
-                </a:solidFill>
-                <a:latin typeface="Calibri"/>
+              <a:rPr b="0" lang="en-IN" sz="2800" spc="-1" strike="noStrike">
+                <a:latin typeface="Arial"/>
               </a:rPr>
               <a:t>Second Outline Level</a:t>
             </a:r>
-            <a:endParaRPr b="0" lang="en-IN" sz="2400" spc="-1" strike="noStrike">
-              <a:solidFill>
-                <a:srgbClr val="000000"/>
-              </a:solidFill>
-              <a:latin typeface="Calibri"/>
+            <a:endParaRPr b="0" lang="en-IN" sz="2800" spc="-1" strike="noStrike">
+              <a:latin typeface="Arial"/>
             </a:endParaRPr>
           </a:p>
           <a:p>
@@ -4255,19 +4195,13 @@
               <a:buChar char=""/>
             </a:pPr>
             <a:r>
-              <a:rPr b="0" lang="en-IN" sz="2000" spc="-1" strike="noStrike">
-                <a:solidFill>
-                  <a:srgbClr val="000000"/>
-                </a:solidFill>
-                <a:latin typeface="Calibri"/>
+              <a:rPr b="0" lang="en-IN" sz="2400" spc="-1" strike="noStrike">
+                <a:latin typeface="Arial"/>
               </a:rPr>
               <a:t>Third Outline Level</a:t>
             </a:r>
-            <a:endParaRPr b="0" lang="en-IN" sz="2000" spc="-1" strike="noStrike">
-              <a:solidFill>
-                <a:srgbClr val="000000"/>
-              </a:solidFill>
-              <a:latin typeface="Calibri"/>
+            <a:endParaRPr b="0" lang="en-IN" sz="2400" spc="-1" strike="noStrike">
+              <a:latin typeface="Arial"/>
             </a:endParaRPr>
           </a:p>
           <a:p>
@@ -4284,18 +4218,12 @@
             </a:pPr>
             <a:r>
               <a:rPr b="0" lang="en-IN" sz="2000" spc="-1" strike="noStrike">
-                <a:solidFill>
-                  <a:srgbClr val="000000"/>
-                </a:solidFill>
-                <a:latin typeface="Calibri"/>
+                <a:latin typeface="Arial"/>
               </a:rPr>
               <a:t>Fourth Outline Level</a:t>
             </a:r>
             <a:endParaRPr b="0" lang="en-IN" sz="2000" spc="-1" strike="noStrike">
-              <a:solidFill>
-                <a:srgbClr val="000000"/>
-              </a:solidFill>
-              <a:latin typeface="Calibri"/>
+              <a:latin typeface="Arial"/>
             </a:endParaRPr>
           </a:p>
           <a:p>
@@ -4312,18 +4240,12 @@
             </a:pPr>
             <a:r>
               <a:rPr b="0" lang="en-IN" sz="2000" spc="-1" strike="noStrike">
-                <a:solidFill>
-                  <a:srgbClr val="000000"/>
-                </a:solidFill>
-                <a:latin typeface="Calibri"/>
+                <a:latin typeface="Arial"/>
               </a:rPr>
               <a:t>Fifth Outline Level</a:t>
             </a:r>
             <a:endParaRPr b="0" lang="en-IN" sz="2000" spc="-1" strike="noStrike">
-              <a:solidFill>
-                <a:srgbClr val="000000"/>
-              </a:solidFill>
-              <a:latin typeface="Calibri"/>
+              <a:latin typeface="Arial"/>
             </a:endParaRPr>
           </a:p>
           <a:p>
@@ -4340,18 +4262,12 @@
             </a:pPr>
             <a:r>
               <a:rPr b="0" lang="en-IN" sz="2000" spc="-1" strike="noStrike">
-                <a:solidFill>
-                  <a:srgbClr val="000000"/>
-                </a:solidFill>
-                <a:latin typeface="Calibri"/>
+                <a:latin typeface="Arial"/>
               </a:rPr>
               <a:t>Sixth Outline Level</a:t>
             </a:r>
             <a:endParaRPr b="0" lang="en-IN" sz="2000" spc="-1" strike="noStrike">
-              <a:solidFill>
-                <a:srgbClr val="000000"/>
-              </a:solidFill>
-              <a:latin typeface="Calibri"/>
+              <a:latin typeface="Arial"/>
             </a:endParaRPr>
           </a:p>
           <a:p>
@@ -4368,18 +4284,12 @@
             </a:pPr>
             <a:r>
               <a:rPr b="0" lang="en-IN" sz="2000" spc="-1" strike="noStrike">
-                <a:solidFill>
-                  <a:srgbClr val="000000"/>
-                </a:solidFill>
-                <a:latin typeface="Calibri"/>
+                <a:latin typeface="Arial"/>
               </a:rPr>
               <a:t>Seventh Outline Level</a:t>
             </a:r>
             <a:endParaRPr b="0" lang="en-IN" sz="2000" spc="-1" strike="noStrike">
-              <a:solidFill>
-                <a:srgbClr val="000000"/>
-              </a:solidFill>
-              <a:latin typeface="Calibri"/>
+              <a:latin typeface="Arial"/>
             </a:endParaRPr>
           </a:p>
         </p:txBody>
@@ -4437,7 +4347,7 @@
         <p:spPr>
           <a:xfrm>
             <a:off x="0" y="0"/>
-            <a:ext cx="164160" cy="5143320"/>
+            <a:ext cx="163800" cy="5142960"/>
           </a:xfrm>
           <a:prstGeom prst="rect">
             <a:avLst/>
@@ -4465,7 +4375,7 @@
         <p:spPr>
           <a:xfrm>
             <a:off x="7132320" y="-1097280"/>
-            <a:ext cx="3474360" cy="3474360"/>
+            <a:ext cx="3474000" cy="3474000"/>
           </a:xfrm>
           <a:prstGeom prst="ellipse">
             <a:avLst/>
@@ -4493,7 +4403,7 @@
         <p:spPr>
           <a:xfrm>
             <a:off x="7498080" y="-822960"/>
-            <a:ext cx="2742840" cy="2742840"/>
+            <a:ext cx="2742480" cy="2742480"/>
           </a:xfrm>
           <a:prstGeom prst="ellipse">
             <a:avLst/>
@@ -4523,7 +4433,7 @@
         <p:spPr>
           <a:xfrm>
             <a:off x="0" y="4754880"/>
-            <a:ext cx="9143640" cy="383760"/>
+            <a:ext cx="9143280" cy="383400"/>
           </a:xfrm>
           <a:prstGeom prst="rect">
             <a:avLst/>
@@ -4551,7 +4461,7 @@
         <p:spPr>
           <a:xfrm>
             <a:off x="164520" y="4754880"/>
-            <a:ext cx="3200040" cy="383760"/>
+            <a:ext cx="3199680" cy="383400"/>
           </a:xfrm>
           <a:prstGeom prst="rect">
             <a:avLst/>
@@ -4583,7 +4493,7 @@
         <p:spPr>
           <a:xfrm>
             <a:off x="502920" y="1005840"/>
-            <a:ext cx="639720" cy="639720"/>
+            <a:ext cx="639360" cy="639360"/>
           </a:xfrm>
           <a:prstGeom prst="rect">
             <a:avLst/>
@@ -4602,7 +4512,7 @@
         <p:spPr>
           <a:xfrm>
             <a:off x="365760" y="1737360"/>
-            <a:ext cx="8412120" cy="822600"/>
+            <a:ext cx="8411760" cy="822240"/>
           </a:xfrm>
           <a:prstGeom prst="rect">
             <a:avLst/>
@@ -4657,7 +4567,7 @@
         <p:spPr>
           <a:xfrm>
             <a:off x="365760" y="2514600"/>
-            <a:ext cx="8412120" cy="685440"/>
+            <a:ext cx="8411760" cy="685080"/>
           </a:xfrm>
           <a:prstGeom prst="rect">
             <a:avLst/>
@@ -4712,7 +4622,7 @@
         <p:spPr>
           <a:xfrm>
             <a:off x="365760" y="3337560"/>
-            <a:ext cx="3474360" cy="402120"/>
+            <a:ext cx="3474000" cy="401760"/>
           </a:xfrm>
           <a:prstGeom prst="rect">
             <a:avLst/>
@@ -4740,7 +4650,7 @@
         <p:spPr>
           <a:xfrm>
             <a:off x="365760" y="3337560"/>
-            <a:ext cx="3474360" cy="402120"/>
+            <a:ext cx="3474000" cy="401760"/>
           </a:xfrm>
           <a:prstGeom prst="rect">
             <a:avLst/>
@@ -4795,7 +4705,7 @@
         <p:spPr>
           <a:xfrm>
             <a:off x="365760" y="4773240"/>
-            <a:ext cx="4571640" cy="347040"/>
+            <a:ext cx="4571280" cy="346680"/>
           </a:xfrm>
           <a:prstGeom prst="rect">
             <a:avLst/>
@@ -4887,7 +4797,7 @@
         <p:spPr>
           <a:xfrm>
             <a:off x="0" y="0"/>
-            <a:ext cx="9143640" cy="959760"/>
+            <a:ext cx="9143280" cy="959400"/>
           </a:xfrm>
           <a:prstGeom prst="rect">
             <a:avLst/>
@@ -4915,7 +4825,7 @@
         <p:spPr>
           <a:xfrm>
             <a:off x="0" y="960120"/>
-            <a:ext cx="9143640" cy="54360"/>
+            <a:ext cx="9143280" cy="54000"/>
           </a:xfrm>
           <a:prstGeom prst="rect">
             <a:avLst/>
@@ -4947,7 +4857,7 @@
         <p:spPr>
           <a:xfrm>
             <a:off x="320040" y="182880"/>
-            <a:ext cx="548280" cy="548280"/>
+            <a:ext cx="547920" cy="547920"/>
           </a:xfrm>
           <a:prstGeom prst="rect">
             <a:avLst/>
@@ -4966,7 +4876,7 @@
         <p:spPr>
           <a:xfrm>
             <a:off x="1005840" y="182880"/>
-            <a:ext cx="7772040" cy="594000"/>
+            <a:ext cx="7771680" cy="593640"/>
           </a:xfrm>
           <a:prstGeom prst="rect">
             <a:avLst/>
@@ -5021,7 +4931,7 @@
         <p:spPr>
           <a:xfrm>
             <a:off x="320040" y="1097280"/>
-            <a:ext cx="5028840" cy="2925720"/>
+            <a:ext cx="5028480" cy="2925360"/>
           </a:xfrm>
           <a:prstGeom prst="rect">
             <a:avLst/>
@@ -5056,7 +4966,7 @@
         <p:spPr>
           <a:xfrm>
             <a:off x="457200" y="1170360"/>
-            <a:ext cx="4754520" cy="255600"/>
+            <a:ext cx="4754160" cy="255240"/>
           </a:xfrm>
           <a:prstGeom prst="rect">
             <a:avLst/>
@@ -5111,7 +5021,7 @@
         <p:spPr>
           <a:xfrm>
             <a:off x="457200" y="1463040"/>
-            <a:ext cx="4754520" cy="2468520"/>
+            <a:ext cx="4754160" cy="2468160"/>
           </a:xfrm>
           <a:prstGeom prst="rect">
             <a:avLst/>
@@ -5488,7 +5398,7 @@
         <p:spPr>
           <a:xfrm>
             <a:off x="320040" y="4114800"/>
-            <a:ext cx="5028840" cy="868320"/>
+            <a:ext cx="5028480" cy="867960"/>
           </a:xfrm>
           <a:prstGeom prst="rect">
             <a:avLst/>
@@ -5516,7 +5426,7 @@
         <p:spPr>
           <a:xfrm>
             <a:off x="457200" y="4160520"/>
-            <a:ext cx="4571640" cy="228240"/>
+            <a:ext cx="4571280" cy="227880"/>
           </a:xfrm>
           <a:prstGeom prst="rect">
             <a:avLst/>
@@ -5571,7 +5481,7 @@
         <p:spPr>
           <a:xfrm>
             <a:off x="457200" y="4370760"/>
-            <a:ext cx="4663080" cy="548280"/>
+            <a:ext cx="4662720" cy="547920"/>
           </a:xfrm>
           <a:prstGeom prst="rect">
             <a:avLst/>
@@ -5650,7 +5560,7 @@
         <p:spPr>
           <a:xfrm>
             <a:off x="5532120" y="1097280"/>
-            <a:ext cx="3291480" cy="3885840"/>
+            <a:ext cx="3291120" cy="3885480"/>
           </a:xfrm>
           <a:prstGeom prst="rect">
             <a:avLst/>
@@ -5685,7 +5595,7 @@
         <p:spPr>
           <a:xfrm>
             <a:off x="5532120" y="1097280"/>
-            <a:ext cx="3291480" cy="438480"/>
+            <a:ext cx="3291120" cy="438120"/>
           </a:xfrm>
           <a:prstGeom prst="rect">
             <a:avLst/>
@@ -5713,7 +5623,7 @@
         <p:spPr>
           <a:xfrm>
             <a:off x="5669280" y="1152000"/>
-            <a:ext cx="3017160" cy="328680"/>
+            <a:ext cx="3016800" cy="328320"/>
           </a:xfrm>
           <a:prstGeom prst="rect">
             <a:avLst/>
@@ -5768,7 +5678,7 @@
         <p:spPr>
           <a:xfrm>
             <a:off x="5596200" y="1645920"/>
-            <a:ext cx="3135960" cy="548280"/>
+            <a:ext cx="3135600" cy="547920"/>
           </a:xfrm>
           <a:prstGeom prst="rect">
             <a:avLst/>
@@ -5796,7 +5706,7 @@
         <p:spPr>
           <a:xfrm>
             <a:off x="5596200" y="1645920"/>
-            <a:ext cx="54360" cy="548280"/>
+            <a:ext cx="54000" cy="547920"/>
           </a:xfrm>
           <a:prstGeom prst="rect">
             <a:avLst/>
@@ -5824,7 +5734,7 @@
         <p:spPr>
           <a:xfrm>
             <a:off x="5715000" y="1682640"/>
-            <a:ext cx="1096920" cy="219240"/>
+            <a:ext cx="1096560" cy="218880"/>
           </a:xfrm>
           <a:prstGeom prst="rect">
             <a:avLst/>
@@ -5879,7 +5789,7 @@
         <p:spPr>
           <a:xfrm>
             <a:off x="5715000" y="1883520"/>
-            <a:ext cx="2925720" cy="255600"/>
+            <a:ext cx="2925360" cy="255240"/>
           </a:xfrm>
           <a:prstGeom prst="rect">
             <a:avLst/>
@@ -5934,7 +5844,7 @@
         <p:spPr>
           <a:xfrm>
             <a:off x="5596200" y="2304360"/>
-            <a:ext cx="3135960" cy="548280"/>
+            <a:ext cx="3135600" cy="547920"/>
           </a:xfrm>
           <a:prstGeom prst="rect">
             <a:avLst/>
@@ -5962,7 +5872,7 @@
         <p:spPr>
           <a:xfrm>
             <a:off x="5596200" y="2304360"/>
-            <a:ext cx="54360" cy="548280"/>
+            <a:ext cx="54000" cy="547920"/>
           </a:xfrm>
           <a:prstGeom prst="rect">
             <a:avLst/>
@@ -5990,7 +5900,7 @@
         <p:spPr>
           <a:xfrm>
             <a:off x="5715000" y="2340720"/>
-            <a:ext cx="1096920" cy="219240"/>
+            <a:ext cx="1096560" cy="218880"/>
           </a:xfrm>
           <a:prstGeom prst="rect">
             <a:avLst/>
@@ -6045,7 +5955,7 @@
         <p:spPr>
           <a:xfrm>
             <a:off x="5715000" y="2541960"/>
-            <a:ext cx="2925720" cy="255600"/>
+            <a:ext cx="2925360" cy="255240"/>
           </a:xfrm>
           <a:prstGeom prst="rect">
             <a:avLst/>
@@ -6100,7 +6010,7 @@
         <p:spPr>
           <a:xfrm>
             <a:off x="5596200" y="2962800"/>
-            <a:ext cx="3135960" cy="548280"/>
+            <a:ext cx="3135600" cy="547920"/>
           </a:xfrm>
           <a:prstGeom prst="rect">
             <a:avLst/>
@@ -6128,7 +6038,7 @@
         <p:spPr>
           <a:xfrm>
             <a:off x="5596200" y="2962800"/>
-            <a:ext cx="54360" cy="548280"/>
+            <a:ext cx="54000" cy="547920"/>
           </a:xfrm>
           <a:prstGeom prst="rect">
             <a:avLst/>
@@ -6156,7 +6066,7 @@
         <p:spPr>
           <a:xfrm>
             <a:off x="5715000" y="2999160"/>
-            <a:ext cx="1096920" cy="219240"/>
+            <a:ext cx="1096560" cy="218880"/>
           </a:xfrm>
           <a:prstGeom prst="rect">
             <a:avLst/>
@@ -6211,7 +6121,7 @@
         <p:spPr>
           <a:xfrm>
             <a:off x="5715000" y="3200400"/>
-            <a:ext cx="2925720" cy="255600"/>
+            <a:ext cx="2925360" cy="255240"/>
           </a:xfrm>
           <a:prstGeom prst="rect">
             <a:avLst/>
@@ -6266,7 +6176,7 @@
         <p:spPr>
           <a:xfrm>
             <a:off x="5596200" y="3620880"/>
-            <a:ext cx="3135960" cy="548280"/>
+            <a:ext cx="3135600" cy="547920"/>
           </a:xfrm>
           <a:prstGeom prst="rect">
             <a:avLst/>
@@ -6294,7 +6204,7 @@
         <p:spPr>
           <a:xfrm>
             <a:off x="5596200" y="3620880"/>
-            <a:ext cx="54360" cy="548280"/>
+            <a:ext cx="54000" cy="547920"/>
           </a:xfrm>
           <a:prstGeom prst="rect">
             <a:avLst/>
@@ -6322,7 +6232,7 @@
         <p:spPr>
           <a:xfrm>
             <a:off x="5715000" y="3657600"/>
-            <a:ext cx="1096920" cy="219240"/>
+            <a:ext cx="1096560" cy="218880"/>
           </a:xfrm>
           <a:prstGeom prst="rect">
             <a:avLst/>
@@ -6377,7 +6287,7 @@
         <p:spPr>
           <a:xfrm>
             <a:off x="5715000" y="3858840"/>
-            <a:ext cx="2925720" cy="255600"/>
+            <a:ext cx="2925360" cy="255240"/>
           </a:xfrm>
           <a:prstGeom prst="rect">
             <a:avLst/>
@@ -6432,7 +6342,7 @@
         <p:spPr>
           <a:xfrm>
             <a:off x="5596200" y="4279320"/>
-            <a:ext cx="3135960" cy="548280"/>
+            <a:ext cx="3135600" cy="547920"/>
           </a:xfrm>
           <a:prstGeom prst="rect">
             <a:avLst/>
@@ -6460,7 +6370,7 @@
         <p:spPr>
           <a:xfrm>
             <a:off x="5596200" y="4279320"/>
-            <a:ext cx="54360" cy="548280"/>
+            <a:ext cx="54000" cy="547920"/>
           </a:xfrm>
           <a:prstGeom prst="rect">
             <a:avLst/>
@@ -6488,7 +6398,7 @@
         <p:spPr>
           <a:xfrm>
             <a:off x="5715000" y="4316040"/>
-            <a:ext cx="1096920" cy="219240"/>
+            <a:ext cx="1096560" cy="218880"/>
           </a:xfrm>
           <a:prstGeom prst="rect">
             <a:avLst/>
@@ -6543,7 +6453,7 @@
         <p:spPr>
           <a:xfrm>
             <a:off x="5715000" y="4517280"/>
-            <a:ext cx="2925720" cy="255600"/>
+            <a:ext cx="2925360" cy="255240"/>
           </a:xfrm>
           <a:prstGeom prst="rect">
             <a:avLst/>
@@ -6635,7 +6545,7 @@
         <p:spPr>
           <a:xfrm>
             <a:off x="0" y="0"/>
-            <a:ext cx="9143640" cy="959760"/>
+            <a:ext cx="9143280" cy="959400"/>
           </a:xfrm>
           <a:prstGeom prst="rect">
             <a:avLst/>
@@ -6663,7 +6573,7 @@
         <p:spPr>
           <a:xfrm>
             <a:off x="0" y="960120"/>
-            <a:ext cx="9143640" cy="54360"/>
+            <a:ext cx="9143280" cy="54000"/>
           </a:xfrm>
           <a:prstGeom prst="rect">
             <a:avLst/>
@@ -6695,7 +6605,7 @@
         <p:spPr>
           <a:xfrm>
             <a:off x="320040" y="182880"/>
-            <a:ext cx="548280" cy="548280"/>
+            <a:ext cx="547920" cy="547920"/>
           </a:xfrm>
           <a:prstGeom prst="rect">
             <a:avLst/>
@@ -6714,7 +6624,7 @@
         <p:spPr>
           <a:xfrm>
             <a:off x="1005840" y="182880"/>
-            <a:ext cx="7772040" cy="594000"/>
+            <a:ext cx="7771680" cy="593640"/>
           </a:xfrm>
           <a:prstGeom prst="rect">
             <a:avLst/>
@@ -6769,7 +6679,7 @@
         <p:spPr>
           <a:xfrm>
             <a:off x="320040" y="1097280"/>
-            <a:ext cx="5028840" cy="3108600"/>
+            <a:ext cx="5028480" cy="3108240"/>
           </a:xfrm>
           <a:prstGeom prst="rect">
             <a:avLst/>
@@ -6804,7 +6714,7 @@
         <p:spPr>
           <a:xfrm>
             <a:off x="457200" y="1170360"/>
-            <a:ext cx="4754520" cy="255600"/>
+            <a:ext cx="4754160" cy="255240"/>
           </a:xfrm>
           <a:prstGeom prst="rect">
             <a:avLst/>
@@ -6859,7 +6769,7 @@
         <p:spPr>
           <a:xfrm>
             <a:off x="457200" y="1444680"/>
-            <a:ext cx="4754520" cy="2651400"/>
+            <a:ext cx="4754160" cy="2651040"/>
           </a:xfrm>
           <a:prstGeom prst="rect">
             <a:avLst/>
@@ -7236,7 +7146,7 @@
         <p:spPr>
           <a:xfrm>
             <a:off x="320040" y="4297680"/>
-            <a:ext cx="5028840" cy="685440"/>
+            <a:ext cx="5028480" cy="685080"/>
           </a:xfrm>
           <a:prstGeom prst="rect">
             <a:avLst/>
@@ -7264,7 +7174,7 @@
         <p:spPr>
           <a:xfrm>
             <a:off x="457200" y="4343400"/>
-            <a:ext cx="4571640" cy="228240"/>
+            <a:ext cx="4571280" cy="227880"/>
           </a:xfrm>
           <a:prstGeom prst="rect">
             <a:avLst/>
@@ -7319,7 +7229,7 @@
         <p:spPr>
           <a:xfrm>
             <a:off x="457200" y="4553640"/>
-            <a:ext cx="4663080" cy="383760"/>
+            <a:ext cx="4662720" cy="383400"/>
           </a:xfrm>
           <a:prstGeom prst="rect">
             <a:avLst/>
@@ -7398,7 +7308,7 @@
         <p:spPr>
           <a:xfrm>
             <a:off x="5532120" y="1097280"/>
-            <a:ext cx="3291480" cy="2011320"/>
+            <a:ext cx="3291120" cy="2010960"/>
           </a:xfrm>
           <a:prstGeom prst="rect">
             <a:avLst/>
@@ -7433,7 +7343,7 @@
         <p:spPr>
           <a:xfrm>
             <a:off x="5532120" y="1097280"/>
-            <a:ext cx="3291480" cy="438480"/>
+            <a:ext cx="3291120" cy="438120"/>
           </a:xfrm>
           <a:prstGeom prst="rect">
             <a:avLst/>
@@ -7461,7 +7371,7 @@
         <p:spPr>
           <a:xfrm>
             <a:off x="5669280" y="1152000"/>
-            <a:ext cx="3017160" cy="328680"/>
+            <a:ext cx="3016800" cy="328320"/>
           </a:xfrm>
           <a:prstGeom prst="rect">
             <a:avLst/>
@@ -7526,7 +7436,7 @@
         <p:spPr>
           <a:xfrm>
             <a:off x="5669280" y="1645920"/>
-            <a:ext cx="3062880" cy="1325520"/>
+            <a:ext cx="3062520" cy="1325160"/>
           </a:xfrm>
           <a:prstGeom prst="rect">
             <a:avLst/>
@@ -7581,7 +7491,7 @@
         <p:spPr>
           <a:xfrm>
             <a:off x="5532120" y="3246120"/>
-            <a:ext cx="3291480" cy="1737000"/>
+            <a:ext cx="3291120" cy="1736640"/>
           </a:xfrm>
           <a:prstGeom prst="rect">
             <a:avLst/>
@@ -7616,7 +7526,7 @@
         <p:spPr>
           <a:xfrm>
             <a:off x="5532120" y="3246120"/>
-            <a:ext cx="3291480" cy="438480"/>
+            <a:ext cx="3291120" cy="438120"/>
           </a:xfrm>
           <a:prstGeom prst="rect">
             <a:avLst/>
@@ -7644,7 +7554,7 @@
         <p:spPr>
           <a:xfrm>
             <a:off x="5669280" y="3300840"/>
-            <a:ext cx="3017160" cy="328680"/>
+            <a:ext cx="3016800" cy="328320"/>
           </a:xfrm>
           <a:prstGeom prst="rect">
             <a:avLst/>
@@ -7709,7 +7619,7 @@
         <p:spPr>
           <a:xfrm>
             <a:off x="5669280" y="3794760"/>
-            <a:ext cx="3062880" cy="1051200"/>
+            <a:ext cx="3062520" cy="1050840"/>
           </a:xfrm>
           <a:prstGeom prst="rect">
             <a:avLst/>
@@ -7801,7 +7711,7 @@
         <p:spPr>
           <a:xfrm>
             <a:off x="0" y="0"/>
-            <a:ext cx="9143640" cy="5143320"/>
+            <a:ext cx="9143280" cy="5142960"/>
           </a:xfrm>
           <a:prstGeom prst="rect">
             <a:avLst/>
@@ -7829,7 +7739,7 @@
         <p:spPr>
           <a:xfrm>
             <a:off x="-1371600" y="-1371600"/>
-            <a:ext cx="4571640" cy="4571640"/>
+            <a:ext cx="4571280" cy="4571280"/>
           </a:xfrm>
           <a:prstGeom prst="ellipse">
             <a:avLst/>
@@ -7857,7 +7767,7 @@
         <p:spPr>
           <a:xfrm>
             <a:off x="5943600" y="2286000"/>
-            <a:ext cx="4114440" cy="4114440"/>
+            <a:ext cx="4114080" cy="4114080"/>
           </a:xfrm>
           <a:prstGeom prst="ellipse">
             <a:avLst/>
@@ -7885,7 +7795,7 @@
         <p:spPr>
           <a:xfrm>
             <a:off x="4023360" y="2103120"/>
-            <a:ext cx="1096920" cy="54360"/>
+            <a:ext cx="1096560" cy="54000"/>
           </a:xfrm>
           <a:prstGeom prst="rect">
             <a:avLst/>
@@ -7913,7 +7823,7 @@
         <p:spPr>
           <a:xfrm>
             <a:off x="4023360" y="1554480"/>
-            <a:ext cx="4571640" cy="411120"/>
+            <a:ext cx="4571280" cy="410760"/>
           </a:xfrm>
           <a:prstGeom prst="rect">
             <a:avLst/>
@@ -7944,7 +7854,7 @@
               </a:tabLst>
             </a:pPr>
             <a:r>
-              <a:rPr b="1" lang="en-US" sz="1300" spc="599" strike="noStrike">
+              <a:rPr b="1" lang="en-US" sz="1300" spc="596" strike="noStrike">
                 <a:solidFill>
                   <a:srgbClr val="48cae4"/>
                 </a:solidFill>
@@ -7968,7 +7878,7 @@
         <p:spPr>
           <a:xfrm>
             <a:off x="4023360" y="2194560"/>
-            <a:ext cx="4754520" cy="1096920"/>
+            <a:ext cx="4754160" cy="1096560"/>
           </a:xfrm>
           <a:prstGeom prst="rect">
             <a:avLst/>
@@ -8047,7 +7957,7 @@
         <p:spPr>
           <a:xfrm>
             <a:off x="4023360" y="3383280"/>
-            <a:ext cx="4754520" cy="822600"/>
+            <a:ext cx="4754160" cy="822240"/>
           </a:xfrm>
           <a:prstGeom prst="rect">
             <a:avLst/>
@@ -8106,7 +8016,7 @@
         <p:spPr>
           <a:xfrm>
             <a:off x="1005840" y="1463040"/>
-            <a:ext cx="1462680" cy="1462680"/>
+            <a:ext cx="1462320" cy="1462320"/>
           </a:xfrm>
           <a:prstGeom prst="rect">
             <a:avLst/>
@@ -8162,7 +8072,7 @@
         <p:spPr>
           <a:xfrm>
             <a:off x="0" y="0"/>
-            <a:ext cx="9143640" cy="959760"/>
+            <a:ext cx="9143280" cy="959400"/>
           </a:xfrm>
           <a:prstGeom prst="rect">
             <a:avLst/>
@@ -8190,7 +8100,7 @@
         <p:spPr>
           <a:xfrm>
             <a:off x="0" y="960120"/>
-            <a:ext cx="9143640" cy="54360"/>
+            <a:ext cx="9143280" cy="54000"/>
           </a:xfrm>
           <a:prstGeom prst="rect">
             <a:avLst/>
@@ -8222,7 +8132,7 @@
         <p:spPr>
           <a:xfrm>
             <a:off x="320040" y="182880"/>
-            <a:ext cx="548280" cy="548280"/>
+            <a:ext cx="547920" cy="547920"/>
           </a:xfrm>
           <a:prstGeom prst="rect">
             <a:avLst/>
@@ -8241,7 +8151,7 @@
         <p:spPr>
           <a:xfrm>
             <a:off x="1005840" y="182880"/>
-            <a:ext cx="7772040" cy="594000"/>
+            <a:ext cx="7771680" cy="593640"/>
           </a:xfrm>
           <a:prstGeom prst="rect">
             <a:avLst/>
@@ -8296,7 +8206,7 @@
         <p:spPr>
           <a:xfrm>
             <a:off x="320040" y="1152000"/>
-            <a:ext cx="8503560" cy="402120"/>
+            <a:ext cx="8503200" cy="401760"/>
           </a:xfrm>
           <a:prstGeom prst="rect">
             <a:avLst/>
@@ -8324,7 +8234,7 @@
         <p:spPr>
           <a:xfrm>
             <a:off x="457200" y="1188720"/>
-            <a:ext cx="8229240" cy="328680"/>
+            <a:ext cx="8228880" cy="328320"/>
           </a:xfrm>
           <a:prstGeom prst="rect">
             <a:avLst/>
@@ -8379,7 +8289,7 @@
         <p:spPr>
           <a:xfrm>
             <a:off x="320040" y="1691640"/>
-            <a:ext cx="4068720" cy="1005480"/>
+            <a:ext cx="4068360" cy="1005120"/>
           </a:xfrm>
           <a:prstGeom prst="rect">
             <a:avLst/>
@@ -8414,7 +8324,7 @@
         <p:spPr>
           <a:xfrm>
             <a:off x="320040" y="1691640"/>
-            <a:ext cx="4068720" cy="438480"/>
+            <a:ext cx="4068360" cy="438120"/>
           </a:xfrm>
           <a:prstGeom prst="rect">
             <a:avLst/>
@@ -8442,7 +8352,7 @@
         <p:spPr>
           <a:xfrm>
             <a:off x="457200" y="1737360"/>
-            <a:ext cx="3748680" cy="347040"/>
+            <a:ext cx="3748320" cy="346680"/>
           </a:xfrm>
           <a:prstGeom prst="rect">
             <a:avLst/>
@@ -8507,7 +8417,7 @@
         <p:spPr>
           <a:xfrm>
             <a:off x="457200" y="2194560"/>
-            <a:ext cx="3748680" cy="383760"/>
+            <a:ext cx="3748320" cy="383400"/>
           </a:xfrm>
           <a:prstGeom prst="rect">
             <a:avLst/>
@@ -8562,7 +8472,7 @@
         <p:spPr>
           <a:xfrm>
             <a:off x="4617720" y="1691640"/>
-            <a:ext cx="4068720" cy="1005480"/>
+            <a:ext cx="4068360" cy="1005120"/>
           </a:xfrm>
           <a:prstGeom prst="rect">
             <a:avLst/>
@@ -8597,7 +8507,7 @@
         <p:spPr>
           <a:xfrm>
             <a:off x="4617720" y="1691640"/>
-            <a:ext cx="4068720" cy="438480"/>
+            <a:ext cx="4068360" cy="438120"/>
           </a:xfrm>
           <a:prstGeom prst="rect">
             <a:avLst/>
@@ -8625,7 +8535,7 @@
         <p:spPr>
           <a:xfrm>
             <a:off x="4754880" y="1737360"/>
-            <a:ext cx="3748680" cy="347040"/>
+            <a:ext cx="3748320" cy="346680"/>
           </a:xfrm>
           <a:prstGeom prst="rect">
             <a:avLst/>
@@ -8690,7 +8600,7 @@
         <p:spPr>
           <a:xfrm>
             <a:off x="4754880" y="2194560"/>
-            <a:ext cx="3748680" cy="383760"/>
+            <a:ext cx="3748320" cy="383400"/>
           </a:xfrm>
           <a:prstGeom prst="rect">
             <a:avLst/>
@@ -8745,7 +8655,7 @@
         <p:spPr>
           <a:xfrm>
             <a:off x="320040" y="2834640"/>
-            <a:ext cx="3657240" cy="328680"/>
+            <a:ext cx="3656880" cy="328320"/>
           </a:xfrm>
           <a:prstGeom prst="rect">
             <a:avLst/>
@@ -8800,7 +8710,7 @@
         <p:spPr>
           <a:xfrm>
             <a:off x="320040" y="3246120"/>
-            <a:ext cx="273960" cy="273960"/>
+            <a:ext cx="273600" cy="273600"/>
           </a:xfrm>
           <a:prstGeom prst="ellipse">
             <a:avLst/>
@@ -8828,7 +8738,7 @@
         <p:spPr>
           <a:xfrm>
             <a:off x="320040" y="3246120"/>
-            <a:ext cx="273960" cy="273960"/>
+            <a:ext cx="273600" cy="273600"/>
           </a:xfrm>
           <a:prstGeom prst="rect">
             <a:avLst/>
@@ -8864,6 +8774,7 @@
                   <a:srgbClr val="0d1b2a"/>
                 </a:solidFill>
                 <a:latin typeface="Calibri"/>
+                <a:ea typeface="DejaVu Sans"/>
               </a:rPr>
               <a:t>1</a:t>
             </a:r>
@@ -8882,7 +8793,7 @@
         <p:spPr>
           <a:xfrm>
             <a:off x="685800" y="3246120"/>
-            <a:ext cx="3840120" cy="301320"/>
+            <a:ext cx="3839760" cy="300960"/>
           </a:xfrm>
           <a:prstGeom prst="rect">
             <a:avLst/>
@@ -8937,7 +8848,7 @@
         <p:spPr>
           <a:xfrm>
             <a:off x="320040" y="3684960"/>
-            <a:ext cx="273960" cy="273960"/>
+            <a:ext cx="273600" cy="273600"/>
           </a:xfrm>
           <a:prstGeom prst="ellipse">
             <a:avLst/>
@@ -8965,7 +8876,7 @@
         <p:spPr>
           <a:xfrm>
             <a:off x="320040" y="3684960"/>
-            <a:ext cx="273960" cy="273960"/>
+            <a:ext cx="273600" cy="273600"/>
           </a:xfrm>
           <a:prstGeom prst="rect">
             <a:avLst/>
@@ -9001,6 +8912,7 @@
                   <a:srgbClr val="0d1b2a"/>
                 </a:solidFill>
                 <a:latin typeface="Calibri"/>
+                <a:ea typeface="DejaVu Sans"/>
               </a:rPr>
               <a:t>2</a:t>
             </a:r>
@@ -9019,7 +8931,7 @@
         <p:spPr>
           <a:xfrm>
             <a:off x="685800" y="3684960"/>
-            <a:ext cx="3840120" cy="301320"/>
+            <a:ext cx="3839760" cy="300960"/>
           </a:xfrm>
           <a:prstGeom prst="rect">
             <a:avLst/>
@@ -9074,7 +8986,7 @@
         <p:spPr>
           <a:xfrm>
             <a:off x="320040" y="4123800"/>
-            <a:ext cx="273960" cy="273960"/>
+            <a:ext cx="273600" cy="273600"/>
           </a:xfrm>
           <a:prstGeom prst="ellipse">
             <a:avLst/>
@@ -9102,7 +9014,7 @@
         <p:spPr>
           <a:xfrm>
             <a:off x="320040" y="4123800"/>
-            <a:ext cx="273960" cy="273960"/>
+            <a:ext cx="273600" cy="273600"/>
           </a:xfrm>
           <a:prstGeom prst="rect">
             <a:avLst/>
@@ -9138,6 +9050,7 @@
                   <a:srgbClr val="0d1b2a"/>
                 </a:solidFill>
                 <a:latin typeface="Calibri"/>
+                <a:ea typeface="DejaVu Sans"/>
               </a:rPr>
               <a:t>3</a:t>
             </a:r>
@@ -9156,7 +9069,7 @@
         <p:spPr>
           <a:xfrm>
             <a:off x="685800" y="4123800"/>
-            <a:ext cx="3840120" cy="301320"/>
+            <a:ext cx="3839760" cy="300960"/>
           </a:xfrm>
           <a:prstGeom prst="rect">
             <a:avLst/>
@@ -9211,7 +9124,7 @@
         <p:spPr>
           <a:xfrm>
             <a:off x="320040" y="4563000"/>
-            <a:ext cx="273960" cy="273960"/>
+            <a:ext cx="273600" cy="273600"/>
           </a:xfrm>
           <a:prstGeom prst="ellipse">
             <a:avLst/>
@@ -9239,7 +9152,7 @@
         <p:spPr>
           <a:xfrm>
             <a:off x="320040" y="4563000"/>
-            <a:ext cx="273960" cy="273960"/>
+            <a:ext cx="273600" cy="273600"/>
           </a:xfrm>
           <a:prstGeom prst="rect">
             <a:avLst/>
@@ -9275,6 +9188,7 @@
                   <a:srgbClr val="0d1b2a"/>
                 </a:solidFill>
                 <a:latin typeface="Calibri"/>
+                <a:ea typeface="DejaVu Sans"/>
               </a:rPr>
               <a:t>4</a:t>
             </a:r>
@@ -9293,7 +9207,7 @@
         <p:spPr>
           <a:xfrm>
             <a:off x="685800" y="4563000"/>
-            <a:ext cx="3840120" cy="301320"/>
+            <a:ext cx="3839760" cy="300960"/>
           </a:xfrm>
           <a:prstGeom prst="rect">
             <a:avLst/>
@@ -9348,7 +9262,7 @@
         <p:spPr>
           <a:xfrm>
             <a:off x="4846320" y="2816280"/>
-            <a:ext cx="3977280" cy="2194200"/>
+            <a:ext cx="3976920" cy="2193840"/>
           </a:xfrm>
           <a:prstGeom prst="rect">
             <a:avLst/>
@@ -9383,7 +9297,7 @@
         <p:spPr>
           <a:xfrm>
             <a:off x="4983480" y="2889360"/>
-            <a:ext cx="3748680" cy="237240"/>
+            <a:ext cx="3748320" cy="236880"/>
           </a:xfrm>
           <a:prstGeom prst="rect">
             <a:avLst/>
@@ -9438,7 +9352,7 @@
         <p:spPr>
           <a:xfrm>
             <a:off x="4983480" y="3182040"/>
-            <a:ext cx="3748680" cy="1718640"/>
+            <a:ext cx="3748320" cy="1718280"/>
           </a:xfrm>
           <a:prstGeom prst="rect">
             <a:avLst/>
@@ -9694,7 +9608,7 @@
         <p:spPr>
           <a:xfrm>
             <a:off x="0" y="0"/>
-            <a:ext cx="9143640" cy="959760"/>
+            <a:ext cx="9143280" cy="959400"/>
           </a:xfrm>
           <a:prstGeom prst="rect">
             <a:avLst/>
@@ -9722,7 +9636,7 @@
         <p:spPr>
           <a:xfrm>
             <a:off x="0" y="960120"/>
-            <a:ext cx="9143640" cy="54360"/>
+            <a:ext cx="9143280" cy="54000"/>
           </a:xfrm>
           <a:prstGeom prst="rect">
             <a:avLst/>
@@ -9754,7 +9668,7 @@
         <p:spPr>
           <a:xfrm>
             <a:off x="320040" y="182880"/>
-            <a:ext cx="548280" cy="548280"/>
+            <a:ext cx="547920" cy="547920"/>
           </a:xfrm>
           <a:prstGeom prst="rect">
             <a:avLst/>
@@ -9773,7 +9687,7 @@
         <p:spPr>
           <a:xfrm>
             <a:off x="1005840" y="182880"/>
-            <a:ext cx="7772040" cy="594000"/>
+            <a:ext cx="7771680" cy="593640"/>
           </a:xfrm>
           <a:prstGeom prst="rect">
             <a:avLst/>
@@ -9828,7 +9742,7 @@
         <p:spPr>
           <a:xfrm>
             <a:off x="320040" y="1097280"/>
-            <a:ext cx="5166000" cy="3748680"/>
+            <a:ext cx="5165640" cy="3748320"/>
           </a:xfrm>
           <a:prstGeom prst="rect">
             <a:avLst/>
@@ -9863,7 +9777,7 @@
         <p:spPr>
           <a:xfrm>
             <a:off x="457200" y="1170360"/>
-            <a:ext cx="4845960" cy="255600"/>
+            <a:ext cx="4845600" cy="255240"/>
           </a:xfrm>
           <a:prstGeom prst="rect">
             <a:avLst/>
@@ -9918,7 +9832,7 @@
         <p:spPr>
           <a:xfrm>
             <a:off x="457200" y="1444680"/>
-            <a:ext cx="4937400" cy="3273120"/>
+            <a:ext cx="4937040" cy="3272760"/>
           </a:xfrm>
           <a:prstGeom prst="rect">
             <a:avLst/>
@@ -10433,7 +10347,7 @@
         <p:spPr>
           <a:xfrm>
             <a:off x="5623560" y="1097280"/>
-            <a:ext cx="3200040" cy="1462680"/>
+            <a:ext cx="3199680" cy="1462320"/>
           </a:xfrm>
           <a:prstGeom prst="rect">
             <a:avLst/>
@@ -10461,7 +10375,7 @@
         <p:spPr>
           <a:xfrm>
             <a:off x="5760720" y="1161360"/>
-            <a:ext cx="2925720" cy="237240"/>
+            <a:ext cx="2925360" cy="236880"/>
           </a:xfrm>
           <a:prstGeom prst="rect">
             <a:avLst/>
@@ -10516,7 +10430,7 @@
         <p:spPr>
           <a:xfrm>
             <a:off x="5760720" y="1389960"/>
-            <a:ext cx="2944080" cy="1096920"/>
+            <a:ext cx="2943720" cy="1096560"/>
           </a:xfrm>
           <a:prstGeom prst="rect">
             <a:avLst/>
@@ -10619,7 +10533,7 @@
         <p:spPr>
           <a:xfrm>
             <a:off x="5623560" y="2697480"/>
-            <a:ext cx="3200040" cy="1371240"/>
+            <a:ext cx="3199680" cy="1370880"/>
           </a:xfrm>
           <a:prstGeom prst="rect">
             <a:avLst/>
@@ -10647,7 +10561,7 @@
         <p:spPr>
           <a:xfrm>
             <a:off x="5760720" y="2761560"/>
-            <a:ext cx="2925720" cy="237240"/>
+            <a:ext cx="2925360" cy="236880"/>
           </a:xfrm>
           <a:prstGeom prst="rect">
             <a:avLst/>
@@ -10702,7 +10616,7 @@
         <p:spPr>
           <a:xfrm>
             <a:off x="5760720" y="3017520"/>
-            <a:ext cx="2944080" cy="959760"/>
+            <a:ext cx="2943720" cy="959400"/>
           </a:xfrm>
           <a:prstGeom prst="rect">
             <a:avLst/>
@@ -10867,7 +10781,7 @@
         <p:spPr>
           <a:xfrm>
             <a:off x="5623560" y="4178880"/>
-            <a:ext cx="3200040" cy="639720"/>
+            <a:ext cx="3199680" cy="639360"/>
           </a:xfrm>
           <a:prstGeom prst="rect">
             <a:avLst/>
@@ -10897,7 +10811,7 @@
         <p:spPr>
           <a:xfrm>
             <a:off x="5623560" y="4178880"/>
-            <a:ext cx="54360" cy="639720"/>
+            <a:ext cx="54000" cy="639360"/>
           </a:xfrm>
           <a:prstGeom prst="rect">
             <a:avLst/>
@@ -10925,7 +10839,7 @@
         <p:spPr>
           <a:xfrm>
             <a:off x="5733360" y="4224600"/>
-            <a:ext cx="3017160" cy="511560"/>
+            <a:ext cx="3016800" cy="511200"/>
           </a:xfrm>
           <a:prstGeom prst="rect">
             <a:avLst/>
@@ -11017,7 +10931,7 @@
         <p:spPr>
           <a:xfrm>
             <a:off x="0" y="0"/>
-            <a:ext cx="9143640" cy="959760"/>
+            <a:ext cx="9143280" cy="959400"/>
           </a:xfrm>
           <a:prstGeom prst="rect">
             <a:avLst/>
@@ -11045,7 +10959,7 @@
         <p:spPr>
           <a:xfrm>
             <a:off x="0" y="960120"/>
-            <a:ext cx="9143640" cy="54360"/>
+            <a:ext cx="9143280" cy="54000"/>
           </a:xfrm>
           <a:prstGeom prst="rect">
             <a:avLst/>
@@ -11077,7 +10991,7 @@
         <p:spPr>
           <a:xfrm>
             <a:off x="320040" y="182880"/>
-            <a:ext cx="548280" cy="548280"/>
+            <a:ext cx="547920" cy="547920"/>
           </a:xfrm>
           <a:prstGeom prst="rect">
             <a:avLst/>
@@ -11096,7 +11010,7 @@
         <p:spPr>
           <a:xfrm>
             <a:off x="1005840" y="182880"/>
-            <a:ext cx="7772040" cy="594000"/>
+            <a:ext cx="7771680" cy="593640"/>
           </a:xfrm>
           <a:prstGeom prst="rect">
             <a:avLst/>
@@ -11151,7 +11065,7 @@
         <p:spPr>
           <a:xfrm>
             <a:off x="320040" y="1115640"/>
-            <a:ext cx="2742840" cy="3565800"/>
+            <a:ext cx="2742480" cy="3565440"/>
           </a:xfrm>
           <a:prstGeom prst="rect">
             <a:avLst/>
@@ -11186,7 +11100,7 @@
         <p:spPr>
           <a:xfrm>
             <a:off x="320040" y="1115640"/>
-            <a:ext cx="2742840" cy="456840"/>
+            <a:ext cx="2742480" cy="456480"/>
           </a:xfrm>
           <a:prstGeom prst="rect">
             <a:avLst/>
@@ -11214,7 +11128,7 @@
         <p:spPr>
           <a:xfrm>
             <a:off x="457200" y="1170360"/>
-            <a:ext cx="2468520" cy="347040"/>
+            <a:ext cx="2468160" cy="346680"/>
           </a:xfrm>
           <a:prstGeom prst="rect">
             <a:avLst/>
@@ -11273,7 +11187,7 @@
         <p:spPr>
           <a:xfrm>
             <a:off x="457200" y="1691640"/>
-            <a:ext cx="237240" cy="237240"/>
+            <a:ext cx="236880" cy="236880"/>
           </a:xfrm>
           <a:prstGeom prst="rect">
             <a:avLst/>
@@ -11292,7 +11206,7 @@
         <p:spPr>
           <a:xfrm>
             <a:off x="777240" y="1673280"/>
-            <a:ext cx="2194200" cy="411120"/>
+            <a:ext cx="2193840" cy="410760"/>
           </a:xfrm>
           <a:prstGeom prst="rect">
             <a:avLst/>
@@ -11351,7 +11265,7 @@
         <p:spPr>
           <a:xfrm>
             <a:off x="457200" y="2331720"/>
-            <a:ext cx="237240" cy="237240"/>
+            <a:ext cx="236880" cy="236880"/>
           </a:xfrm>
           <a:prstGeom prst="rect">
             <a:avLst/>
@@ -11370,7 +11284,7 @@
         <p:spPr>
           <a:xfrm>
             <a:off x="777240" y="2313360"/>
-            <a:ext cx="2194200" cy="411120"/>
+            <a:ext cx="2193840" cy="410760"/>
           </a:xfrm>
           <a:prstGeom prst="rect">
             <a:avLst/>
@@ -11429,7 +11343,7 @@
         <p:spPr>
           <a:xfrm>
             <a:off x="457200" y="2971800"/>
-            <a:ext cx="237240" cy="237240"/>
+            <a:ext cx="236880" cy="236880"/>
           </a:xfrm>
           <a:prstGeom prst="rect">
             <a:avLst/>
@@ -11448,7 +11362,7 @@
         <p:spPr>
           <a:xfrm>
             <a:off x="777240" y="2953440"/>
-            <a:ext cx="2194200" cy="411120"/>
+            <a:ext cx="2193840" cy="410760"/>
           </a:xfrm>
           <a:prstGeom prst="rect">
             <a:avLst/>
@@ -11507,7 +11421,7 @@
         <p:spPr>
           <a:xfrm>
             <a:off x="457200" y="3611880"/>
-            <a:ext cx="237240" cy="237240"/>
+            <a:ext cx="236880" cy="236880"/>
           </a:xfrm>
           <a:prstGeom prst="rect">
             <a:avLst/>
@@ -11526,7 +11440,7 @@
         <p:spPr>
           <a:xfrm>
             <a:off x="777240" y="3593520"/>
-            <a:ext cx="2194200" cy="411120"/>
+            <a:ext cx="2193840" cy="410760"/>
           </a:xfrm>
           <a:prstGeom prst="rect">
             <a:avLst/>
@@ -11581,7 +11495,7 @@
         <p:spPr>
           <a:xfrm>
             <a:off x="3246120" y="1115640"/>
-            <a:ext cx="2742840" cy="3565800"/>
+            <a:ext cx="2742480" cy="3565440"/>
           </a:xfrm>
           <a:prstGeom prst="rect">
             <a:avLst/>
@@ -11616,7 +11530,7 @@
         <p:spPr>
           <a:xfrm>
             <a:off x="3246120" y="1115640"/>
-            <a:ext cx="2742840" cy="456840"/>
+            <a:ext cx="2742480" cy="456480"/>
           </a:xfrm>
           <a:prstGeom prst="rect">
             <a:avLst/>
@@ -11644,7 +11558,7 @@
         <p:spPr>
           <a:xfrm>
             <a:off x="3383280" y="1170360"/>
-            <a:ext cx="2468520" cy="347040"/>
+            <a:ext cx="2468160" cy="346680"/>
           </a:xfrm>
           <a:prstGeom prst="rect">
             <a:avLst/>
@@ -11703,7 +11617,7 @@
         <p:spPr>
           <a:xfrm>
             <a:off x="3383280" y="1691640"/>
-            <a:ext cx="237240" cy="237240"/>
+            <a:ext cx="236880" cy="236880"/>
           </a:xfrm>
           <a:prstGeom prst="rect">
             <a:avLst/>
@@ -11722,7 +11636,7 @@
         <p:spPr>
           <a:xfrm>
             <a:off x="3703320" y="1673280"/>
-            <a:ext cx="2194200" cy="411120"/>
+            <a:ext cx="2193840" cy="410760"/>
           </a:xfrm>
           <a:prstGeom prst="rect">
             <a:avLst/>
@@ -11781,7 +11695,7 @@
         <p:spPr>
           <a:xfrm>
             <a:off x="3383280" y="2331720"/>
-            <a:ext cx="237240" cy="237240"/>
+            <a:ext cx="236880" cy="236880"/>
           </a:xfrm>
           <a:prstGeom prst="rect">
             <a:avLst/>
@@ -11800,7 +11714,7 @@
         <p:spPr>
           <a:xfrm>
             <a:off x="3703320" y="2313360"/>
-            <a:ext cx="2194200" cy="411120"/>
+            <a:ext cx="2193840" cy="410760"/>
           </a:xfrm>
           <a:prstGeom prst="rect">
             <a:avLst/>
@@ -11859,7 +11773,7 @@
         <p:spPr>
           <a:xfrm>
             <a:off x="3383280" y="2971800"/>
-            <a:ext cx="237240" cy="237240"/>
+            <a:ext cx="236880" cy="236880"/>
           </a:xfrm>
           <a:prstGeom prst="rect">
             <a:avLst/>
@@ -11878,7 +11792,7 @@
         <p:spPr>
           <a:xfrm>
             <a:off x="3703320" y="2953440"/>
-            <a:ext cx="2194200" cy="411120"/>
+            <a:ext cx="2193840" cy="410760"/>
           </a:xfrm>
           <a:prstGeom prst="rect">
             <a:avLst/>
@@ -11937,7 +11851,7 @@
         <p:spPr>
           <a:xfrm>
             <a:off x="3383280" y="3611880"/>
-            <a:ext cx="237240" cy="237240"/>
+            <a:ext cx="236880" cy="236880"/>
           </a:xfrm>
           <a:prstGeom prst="rect">
             <a:avLst/>
@@ -11956,7 +11870,7 @@
         <p:spPr>
           <a:xfrm>
             <a:off x="3703320" y="3593520"/>
-            <a:ext cx="2194200" cy="411120"/>
+            <a:ext cx="2193840" cy="410760"/>
           </a:xfrm>
           <a:prstGeom prst="rect">
             <a:avLst/>
@@ -12011,7 +11925,7 @@
         <p:spPr>
           <a:xfrm>
             <a:off x="6172200" y="1115640"/>
-            <a:ext cx="2742840" cy="3565800"/>
+            <a:ext cx="2742480" cy="3565440"/>
           </a:xfrm>
           <a:prstGeom prst="rect">
             <a:avLst/>
@@ -12046,7 +11960,7 @@
         <p:spPr>
           <a:xfrm>
             <a:off x="6172200" y="1115640"/>
-            <a:ext cx="2742840" cy="456840"/>
+            <a:ext cx="2742480" cy="456480"/>
           </a:xfrm>
           <a:prstGeom prst="rect">
             <a:avLst/>
@@ -12074,7 +11988,7 @@
         <p:spPr>
           <a:xfrm>
             <a:off x="6309360" y="1170360"/>
-            <a:ext cx="2468520" cy="347040"/>
+            <a:ext cx="2468160" cy="346680"/>
           </a:xfrm>
           <a:prstGeom prst="rect">
             <a:avLst/>
@@ -12133,7 +12047,7 @@
         <p:spPr>
           <a:xfrm>
             <a:off x="6309360" y="1691640"/>
-            <a:ext cx="237240" cy="237240"/>
+            <a:ext cx="236880" cy="236880"/>
           </a:xfrm>
           <a:prstGeom prst="rect">
             <a:avLst/>
@@ -12152,7 +12066,7 @@
         <p:spPr>
           <a:xfrm>
             <a:off x="6629400" y="1673280"/>
-            <a:ext cx="2194200" cy="411120"/>
+            <a:ext cx="2193840" cy="410760"/>
           </a:xfrm>
           <a:prstGeom prst="rect">
             <a:avLst/>
@@ -12211,7 +12125,7 @@
         <p:spPr>
           <a:xfrm>
             <a:off x="6309360" y="2331720"/>
-            <a:ext cx="237240" cy="237240"/>
+            <a:ext cx="236880" cy="236880"/>
           </a:xfrm>
           <a:prstGeom prst="rect">
             <a:avLst/>
@@ -12230,7 +12144,7 @@
         <p:spPr>
           <a:xfrm>
             <a:off x="6629400" y="2313360"/>
-            <a:ext cx="2194200" cy="411120"/>
+            <a:ext cx="2193840" cy="410760"/>
           </a:xfrm>
           <a:prstGeom prst="rect">
             <a:avLst/>
@@ -12289,7 +12203,7 @@
         <p:spPr>
           <a:xfrm>
             <a:off x="6309360" y="2971800"/>
-            <a:ext cx="237240" cy="237240"/>
+            <a:ext cx="236880" cy="236880"/>
           </a:xfrm>
           <a:prstGeom prst="rect">
             <a:avLst/>
@@ -12308,7 +12222,7 @@
         <p:spPr>
           <a:xfrm>
             <a:off x="6629400" y="2953440"/>
-            <a:ext cx="2194200" cy="411120"/>
+            <a:ext cx="2193840" cy="410760"/>
           </a:xfrm>
           <a:prstGeom prst="rect">
             <a:avLst/>
@@ -12367,7 +12281,7 @@
         <p:spPr>
           <a:xfrm>
             <a:off x="6309360" y="3611880"/>
-            <a:ext cx="237240" cy="237240"/>
+            <a:ext cx="236880" cy="236880"/>
           </a:xfrm>
           <a:prstGeom prst="rect">
             <a:avLst/>
@@ -12386,7 +12300,7 @@
         <p:spPr>
           <a:xfrm>
             <a:off x="6629400" y="3593520"/>
-            <a:ext cx="2194200" cy="411120"/>
+            <a:ext cx="2193840" cy="410760"/>
           </a:xfrm>
           <a:prstGeom prst="rect">
             <a:avLst/>
@@ -12441,7 +12355,7 @@
         <p:spPr>
           <a:xfrm>
             <a:off x="320040" y="4773240"/>
-            <a:ext cx="8503560" cy="292320"/>
+            <a:ext cx="8503200" cy="291960"/>
           </a:xfrm>
           <a:prstGeom prst="rect">
             <a:avLst/>
@@ -12475,7 +12389,7 @@
         <p:spPr>
           <a:xfrm>
             <a:off x="402480" y="4818960"/>
-            <a:ext cx="200880" cy="200880"/>
+            <a:ext cx="200520" cy="200520"/>
           </a:xfrm>
           <a:prstGeom prst="rect">
             <a:avLst/>
@@ -12494,7 +12408,7 @@
         <p:spPr>
           <a:xfrm>
             <a:off x="658440" y="4818960"/>
-            <a:ext cx="8046360" cy="219240"/>
+            <a:ext cx="8046000" cy="218880"/>
           </a:xfrm>
           <a:prstGeom prst="rect">
             <a:avLst/>
@@ -12586,7 +12500,7 @@
         <p:spPr>
           <a:xfrm>
             <a:off x="0" y="0"/>
-            <a:ext cx="9143640" cy="959760"/>
+            <a:ext cx="9143280" cy="959400"/>
           </a:xfrm>
           <a:prstGeom prst="rect">
             <a:avLst/>
@@ -12614,7 +12528,7 @@
         <p:spPr>
           <a:xfrm>
             <a:off x="0" y="960120"/>
-            <a:ext cx="9143640" cy="54360"/>
+            <a:ext cx="9143280" cy="54000"/>
           </a:xfrm>
           <a:prstGeom prst="rect">
             <a:avLst/>
@@ -12646,7 +12560,7 @@
         <p:spPr>
           <a:xfrm>
             <a:off x="320040" y="182880"/>
-            <a:ext cx="548280" cy="548280"/>
+            <a:ext cx="547920" cy="547920"/>
           </a:xfrm>
           <a:prstGeom prst="rect">
             <a:avLst/>
@@ -12665,7 +12579,7 @@
         <p:spPr>
           <a:xfrm>
             <a:off x="1005840" y="182880"/>
-            <a:ext cx="7772040" cy="594000"/>
+            <a:ext cx="7771680" cy="593640"/>
           </a:xfrm>
           <a:prstGeom prst="rect">
             <a:avLst/>
@@ -12720,7 +12634,7 @@
         <p:spPr>
           <a:xfrm>
             <a:off x="320040" y="1152000"/>
-            <a:ext cx="8503560" cy="383760"/>
+            <a:ext cx="8503200" cy="383400"/>
           </a:xfrm>
           <a:prstGeom prst="rect">
             <a:avLst/>
@@ -12748,7 +12662,7 @@
         <p:spPr>
           <a:xfrm>
             <a:off x="457200" y="1188720"/>
-            <a:ext cx="8229240" cy="310680"/>
+            <a:ext cx="8228880" cy="310320"/>
           </a:xfrm>
           <a:prstGeom prst="rect">
             <a:avLst/>
@@ -12803,7 +12717,7 @@
         <p:spPr>
           <a:xfrm>
             <a:off x="320040" y="1664280"/>
-            <a:ext cx="3885840" cy="3108600"/>
+            <a:ext cx="3885480" cy="3108240"/>
           </a:xfrm>
           <a:prstGeom prst="rect">
             <a:avLst/>
@@ -12838,7 +12752,7 @@
         <p:spPr>
           <a:xfrm>
             <a:off x="320040" y="1664280"/>
-            <a:ext cx="3885840" cy="456840"/>
+            <a:ext cx="3885480" cy="456480"/>
           </a:xfrm>
           <a:prstGeom prst="rect">
             <a:avLst/>
@@ -12866,7 +12780,7 @@
         <p:spPr>
           <a:xfrm>
             <a:off x="457200" y="1710000"/>
-            <a:ext cx="3657240" cy="347040"/>
+            <a:ext cx="3656880" cy="346680"/>
           </a:xfrm>
           <a:prstGeom prst="rect">
             <a:avLst/>
@@ -12935,7 +12849,7 @@
         <p:spPr>
           <a:xfrm>
             <a:off x="411480" y="2231280"/>
-            <a:ext cx="237240" cy="237240"/>
+            <a:ext cx="236880" cy="236880"/>
           </a:xfrm>
           <a:prstGeom prst="rect">
             <a:avLst/>
@@ -12954,7 +12868,7 @@
         <p:spPr>
           <a:xfrm>
             <a:off x="749880" y="2203560"/>
-            <a:ext cx="3337200" cy="347040"/>
+            <a:ext cx="3336840" cy="346680"/>
           </a:xfrm>
           <a:prstGeom prst="rect">
             <a:avLst/>
@@ -13013,7 +12927,7 @@
         <p:spPr>
           <a:xfrm>
             <a:off x="411480" y="2816280"/>
-            <a:ext cx="237240" cy="237240"/>
+            <a:ext cx="236880" cy="236880"/>
           </a:xfrm>
           <a:prstGeom prst="rect">
             <a:avLst/>
@@ -13032,7 +12946,7 @@
         <p:spPr>
           <a:xfrm>
             <a:off x="749880" y="2788920"/>
-            <a:ext cx="3337200" cy="347040"/>
+            <a:ext cx="3336840" cy="346680"/>
           </a:xfrm>
           <a:prstGeom prst="rect">
             <a:avLst/>
@@ -13091,7 +13005,7 @@
         <p:spPr>
           <a:xfrm>
             <a:off x="411480" y="3401640"/>
-            <a:ext cx="237240" cy="237240"/>
+            <a:ext cx="236880" cy="236880"/>
           </a:xfrm>
           <a:prstGeom prst="rect">
             <a:avLst/>
@@ -13110,7 +13024,7 @@
         <p:spPr>
           <a:xfrm>
             <a:off x="749880" y="3374280"/>
-            <a:ext cx="3337200" cy="347040"/>
+            <a:ext cx="3336840" cy="346680"/>
           </a:xfrm>
           <a:prstGeom prst="rect">
             <a:avLst/>
@@ -13169,7 +13083,7 @@
         <p:spPr>
           <a:xfrm>
             <a:off x="411480" y="3986640"/>
-            <a:ext cx="237240" cy="237240"/>
+            <a:ext cx="236880" cy="236880"/>
           </a:xfrm>
           <a:prstGeom prst="rect">
             <a:avLst/>
@@ -13188,7 +13102,7 @@
         <p:spPr>
           <a:xfrm>
             <a:off x="749880" y="3959280"/>
-            <a:ext cx="3337200" cy="347040"/>
+            <a:ext cx="3336840" cy="346680"/>
           </a:xfrm>
           <a:prstGeom prst="rect">
             <a:avLst/>
@@ -13247,7 +13161,7 @@
         <p:spPr>
           <a:xfrm>
             <a:off x="4297680" y="2651760"/>
-            <a:ext cx="456840" cy="456840"/>
+            <a:ext cx="456480" cy="456480"/>
           </a:xfrm>
           <a:prstGeom prst="rect">
             <a:avLst/>
@@ -13266,7 +13180,7 @@
         <p:spPr>
           <a:xfrm>
             <a:off x="4892040" y="1664280"/>
-            <a:ext cx="3931560" cy="3108600"/>
+            <a:ext cx="3931200" cy="3108240"/>
           </a:xfrm>
           <a:prstGeom prst="rect">
             <a:avLst/>
@@ -13301,7 +13215,7 @@
         <p:spPr>
           <a:xfrm>
             <a:off x="4892040" y="1664280"/>
-            <a:ext cx="3931560" cy="456840"/>
+            <a:ext cx="3931200" cy="456480"/>
           </a:xfrm>
           <a:prstGeom prst="rect">
             <a:avLst/>
@@ -13329,7 +13243,7 @@
         <p:spPr>
           <a:xfrm>
             <a:off x="5029200" y="1710000"/>
-            <a:ext cx="3657240" cy="347040"/>
+            <a:ext cx="3656880" cy="346680"/>
           </a:xfrm>
           <a:prstGeom prst="rect">
             <a:avLst/>
@@ -13398,7 +13312,7 @@
         <p:spPr>
           <a:xfrm>
             <a:off x="4983480" y="2231280"/>
-            <a:ext cx="237240" cy="237240"/>
+            <a:ext cx="236880" cy="236880"/>
           </a:xfrm>
           <a:prstGeom prst="rect">
             <a:avLst/>
@@ -13417,7 +13331,7 @@
         <p:spPr>
           <a:xfrm>
             <a:off x="5321880" y="2203560"/>
-            <a:ext cx="3382920" cy="319680"/>
+            <a:ext cx="3382560" cy="319320"/>
           </a:xfrm>
           <a:prstGeom prst="rect">
             <a:avLst/>
@@ -13476,7 +13390,7 @@
         <p:spPr>
           <a:xfrm>
             <a:off x="4983480" y="2743200"/>
-            <a:ext cx="237240" cy="237240"/>
+            <a:ext cx="236880" cy="236880"/>
           </a:xfrm>
           <a:prstGeom prst="rect">
             <a:avLst/>
@@ -13495,7 +13409,7 @@
         <p:spPr>
           <a:xfrm>
             <a:off x="5321880" y="2715840"/>
-            <a:ext cx="3382920" cy="319680"/>
+            <a:ext cx="3382560" cy="319320"/>
           </a:xfrm>
           <a:prstGeom prst="rect">
             <a:avLst/>
@@ -13554,7 +13468,7 @@
         <p:spPr>
           <a:xfrm>
             <a:off x="4983480" y="3255120"/>
-            <a:ext cx="237240" cy="237240"/>
+            <a:ext cx="236880" cy="236880"/>
           </a:xfrm>
           <a:prstGeom prst="rect">
             <a:avLst/>
@@ -13573,7 +13487,7 @@
         <p:spPr>
           <a:xfrm>
             <a:off x="5321880" y="3227760"/>
-            <a:ext cx="3382920" cy="319680"/>
+            <a:ext cx="3382560" cy="319320"/>
           </a:xfrm>
           <a:prstGeom prst="rect">
             <a:avLst/>
@@ -13632,7 +13546,7 @@
         <p:spPr>
           <a:xfrm>
             <a:off x="4983480" y="3767400"/>
-            <a:ext cx="237240" cy="237240"/>
+            <a:ext cx="236880" cy="236880"/>
           </a:xfrm>
           <a:prstGeom prst="rect">
             <a:avLst/>
@@ -13651,7 +13565,7 @@
         <p:spPr>
           <a:xfrm>
             <a:off x="5321880" y="3740040"/>
-            <a:ext cx="3382920" cy="319680"/>
+            <a:ext cx="3382560" cy="319320"/>
           </a:xfrm>
           <a:prstGeom prst="rect">
             <a:avLst/>
@@ -13710,7 +13624,7 @@
         <p:spPr>
           <a:xfrm>
             <a:off x="4983480" y="4279320"/>
-            <a:ext cx="237240" cy="237240"/>
+            <a:ext cx="236880" cy="236880"/>
           </a:xfrm>
           <a:prstGeom prst="rect">
             <a:avLst/>
@@ -13729,7 +13643,7 @@
         <p:spPr>
           <a:xfrm>
             <a:off x="5321880" y="4251960"/>
-            <a:ext cx="3382920" cy="319680"/>
+            <a:ext cx="3382560" cy="319320"/>
           </a:xfrm>
           <a:prstGeom prst="rect">
             <a:avLst/>
@@ -13821,7 +13735,7 @@
         <p:spPr>
           <a:xfrm>
             <a:off x="0" y="0"/>
-            <a:ext cx="9143640" cy="5143320"/>
+            <a:ext cx="9143280" cy="5142960"/>
           </a:xfrm>
           <a:prstGeom prst="rect">
             <a:avLst/>
@@ -13849,7 +13763,7 @@
         <p:spPr>
           <a:xfrm>
             <a:off x="-1371600" y="-1371600"/>
-            <a:ext cx="4571640" cy="4571640"/>
+            <a:ext cx="4571280" cy="4571280"/>
           </a:xfrm>
           <a:prstGeom prst="ellipse">
             <a:avLst/>
@@ -13877,7 +13791,7 @@
         <p:spPr>
           <a:xfrm>
             <a:off x="5943600" y="2286000"/>
-            <a:ext cx="4114440" cy="4114440"/>
+            <a:ext cx="4114080" cy="4114080"/>
           </a:xfrm>
           <a:prstGeom prst="ellipse">
             <a:avLst/>
@@ -13905,7 +13819,7 @@
         <p:spPr>
           <a:xfrm>
             <a:off x="4023360" y="2103120"/>
-            <a:ext cx="1096920" cy="54360"/>
+            <a:ext cx="1096560" cy="54000"/>
           </a:xfrm>
           <a:prstGeom prst="rect">
             <a:avLst/>
@@ -13933,7 +13847,7 @@
         <p:spPr>
           <a:xfrm>
             <a:off x="4023360" y="1554480"/>
-            <a:ext cx="4571640" cy="411120"/>
+            <a:ext cx="4571280" cy="410760"/>
           </a:xfrm>
           <a:prstGeom prst="rect">
             <a:avLst/>
@@ -13964,7 +13878,7 @@
               </a:tabLst>
             </a:pPr>
             <a:r>
-              <a:rPr b="1" lang="en-US" sz="1300" spc="599" strike="noStrike">
+              <a:rPr b="1" lang="en-US" sz="1300" spc="596" strike="noStrike">
                 <a:solidFill>
                   <a:srgbClr val="48cae4"/>
                 </a:solidFill>
@@ -13988,7 +13902,7 @@
         <p:spPr>
           <a:xfrm>
             <a:off x="4023360" y="2194560"/>
-            <a:ext cx="4754520" cy="1096920"/>
+            <a:ext cx="4754160" cy="1096560"/>
           </a:xfrm>
           <a:prstGeom prst="rect">
             <a:avLst/>
@@ -14067,7 +13981,7 @@
         <p:spPr>
           <a:xfrm>
             <a:off x="4023360" y="3383280"/>
-            <a:ext cx="4754520" cy="822600"/>
+            <a:ext cx="4754160" cy="822240"/>
           </a:xfrm>
           <a:prstGeom prst="rect">
             <a:avLst/>
@@ -14126,7 +14040,7 @@
         <p:spPr>
           <a:xfrm>
             <a:off x="1005840" y="1463040"/>
-            <a:ext cx="1462680" cy="1462680"/>
+            <a:ext cx="1462320" cy="1462320"/>
           </a:xfrm>
           <a:prstGeom prst="rect">
             <a:avLst/>
@@ -14182,7 +14096,7 @@
         <p:spPr>
           <a:xfrm>
             <a:off x="0" y="0"/>
-            <a:ext cx="9143640" cy="959760"/>
+            <a:ext cx="9143280" cy="959400"/>
           </a:xfrm>
           <a:prstGeom prst="rect">
             <a:avLst/>
@@ -14210,7 +14124,7 @@
         <p:spPr>
           <a:xfrm>
             <a:off x="0" y="960120"/>
-            <a:ext cx="9143640" cy="54360"/>
+            <a:ext cx="9143280" cy="54000"/>
           </a:xfrm>
           <a:prstGeom prst="rect">
             <a:avLst/>
@@ -14242,7 +14156,7 @@
         <p:spPr>
           <a:xfrm>
             <a:off x="320040" y="182880"/>
-            <a:ext cx="548280" cy="548280"/>
+            <a:ext cx="547920" cy="547920"/>
           </a:xfrm>
           <a:prstGeom prst="rect">
             <a:avLst/>
@@ -14261,7 +14175,7 @@
         <p:spPr>
           <a:xfrm>
             <a:off x="1005840" y="182880"/>
-            <a:ext cx="7772040" cy="594000"/>
+            <a:ext cx="7771680" cy="593640"/>
           </a:xfrm>
           <a:prstGeom prst="rect">
             <a:avLst/>
@@ -14316,7 +14230,7 @@
         <p:spPr>
           <a:xfrm>
             <a:off x="320040" y="1188720"/>
-            <a:ext cx="3931560" cy="3520080"/>
+            <a:ext cx="3931200" cy="3519720"/>
           </a:xfrm>
           <a:prstGeom prst="rect">
             <a:avLst/>
@@ -14351,7 +14265,7 @@
         <p:spPr>
           <a:xfrm>
             <a:off x="320040" y="1188720"/>
-            <a:ext cx="3931560" cy="475200"/>
+            <a:ext cx="3931200" cy="474840"/>
           </a:xfrm>
           <a:prstGeom prst="rect">
             <a:avLst/>
@@ -14379,7 +14293,7 @@
         <p:spPr>
           <a:xfrm>
             <a:off x="457200" y="1243440"/>
-            <a:ext cx="3702960" cy="365400"/>
+            <a:ext cx="3702600" cy="365040"/>
           </a:xfrm>
           <a:prstGeom prst="rect">
             <a:avLst/>
@@ -14434,7 +14348,7 @@
         <p:spPr>
           <a:xfrm>
             <a:off x="457200" y="1801440"/>
-            <a:ext cx="959760" cy="273960"/>
+            <a:ext cx="959400" cy="273600"/>
           </a:xfrm>
           <a:prstGeom prst="rect">
             <a:avLst/>
@@ -14489,7 +14403,7 @@
         <p:spPr>
           <a:xfrm>
             <a:off x="457200" y="2030040"/>
-            <a:ext cx="3657240" cy="365400"/>
+            <a:ext cx="3656880" cy="365040"/>
           </a:xfrm>
           <a:prstGeom prst="rect">
             <a:avLst/>
@@ -14544,7 +14458,7 @@
         <p:spPr>
           <a:xfrm>
             <a:off x="457200" y="2423160"/>
-            <a:ext cx="3565800" cy="13320"/>
+            <a:ext cx="3565440" cy="12960"/>
           </a:xfrm>
           <a:prstGeom prst="rect">
             <a:avLst/>
@@ -14572,7 +14486,7 @@
         <p:spPr>
           <a:xfrm>
             <a:off x="457200" y="2496240"/>
-            <a:ext cx="959760" cy="273960"/>
+            <a:ext cx="959400" cy="273600"/>
           </a:xfrm>
           <a:prstGeom prst="rect">
             <a:avLst/>
@@ -14627,7 +14541,7 @@
         <p:spPr>
           <a:xfrm>
             <a:off x="457200" y="2724840"/>
-            <a:ext cx="3657240" cy="365400"/>
+            <a:ext cx="3656880" cy="365040"/>
           </a:xfrm>
           <a:prstGeom prst="rect">
             <a:avLst/>
@@ -14682,7 +14596,7 @@
         <p:spPr>
           <a:xfrm>
             <a:off x="457200" y="3117960"/>
-            <a:ext cx="3565800" cy="13320"/>
+            <a:ext cx="3565440" cy="12960"/>
           </a:xfrm>
           <a:prstGeom prst="rect">
             <a:avLst/>
@@ -14710,7 +14624,7 @@
         <p:spPr>
           <a:xfrm>
             <a:off x="457200" y="3191400"/>
-            <a:ext cx="959760" cy="273960"/>
+            <a:ext cx="959400" cy="273600"/>
           </a:xfrm>
           <a:prstGeom prst="rect">
             <a:avLst/>
@@ -14765,7 +14679,7 @@
         <p:spPr>
           <a:xfrm>
             <a:off x="457200" y="3420000"/>
-            <a:ext cx="3657240" cy="365400"/>
+            <a:ext cx="3656880" cy="365040"/>
           </a:xfrm>
           <a:prstGeom prst="rect">
             <a:avLst/>
@@ -14820,7 +14734,7 @@
         <p:spPr>
           <a:xfrm>
             <a:off x="457200" y="3813120"/>
-            <a:ext cx="3565800" cy="13320"/>
+            <a:ext cx="3565440" cy="12960"/>
           </a:xfrm>
           <a:prstGeom prst="rect">
             <a:avLst/>
@@ -14848,7 +14762,7 @@
         <p:spPr>
           <a:xfrm>
             <a:off x="457200" y="3886200"/>
-            <a:ext cx="959760" cy="273960"/>
+            <a:ext cx="959400" cy="273600"/>
           </a:xfrm>
           <a:prstGeom prst="rect">
             <a:avLst/>
@@ -14903,7 +14817,7 @@
         <p:spPr>
           <a:xfrm>
             <a:off x="457200" y="4114800"/>
-            <a:ext cx="3657240" cy="365400"/>
+            <a:ext cx="3656880" cy="365040"/>
           </a:xfrm>
           <a:prstGeom prst="rect">
             <a:avLst/>
@@ -14958,7 +14872,7 @@
         <p:spPr>
           <a:xfrm>
             <a:off x="457200" y="4434840"/>
-            <a:ext cx="3565800" cy="182520"/>
+            <a:ext cx="3565440" cy="182160"/>
           </a:xfrm>
           <a:prstGeom prst="rect">
             <a:avLst/>
@@ -14990,7 +14904,7 @@
         <p:spPr>
           <a:xfrm>
             <a:off x="502920" y="4425840"/>
-            <a:ext cx="182520" cy="182520"/>
+            <a:ext cx="182160" cy="182160"/>
           </a:xfrm>
           <a:prstGeom prst="rect">
             <a:avLst/>
@@ -15009,7 +14923,7 @@
         <p:spPr>
           <a:xfrm>
             <a:off x="749880" y="4425840"/>
-            <a:ext cx="3200040" cy="200880"/>
+            <a:ext cx="3199680" cy="200520"/>
           </a:xfrm>
           <a:prstGeom prst="rect">
             <a:avLst/>
@@ -15064,7 +14978,7 @@
         <p:spPr>
           <a:xfrm>
             <a:off x="4846320" y="1188720"/>
-            <a:ext cx="3931560" cy="3520080"/>
+            <a:ext cx="3931200" cy="3519720"/>
           </a:xfrm>
           <a:prstGeom prst="rect">
             <a:avLst/>
@@ -15099,7 +15013,7 @@
         <p:spPr>
           <a:xfrm>
             <a:off x="4846320" y="1188720"/>
-            <a:ext cx="3931560" cy="475200"/>
+            <a:ext cx="3931200" cy="474840"/>
           </a:xfrm>
           <a:prstGeom prst="rect">
             <a:avLst/>
@@ -15127,7 +15041,7 @@
         <p:spPr>
           <a:xfrm>
             <a:off x="4983480" y="1243440"/>
-            <a:ext cx="3702960" cy="365400"/>
+            <a:ext cx="3702600" cy="365040"/>
           </a:xfrm>
           <a:prstGeom prst="rect">
             <a:avLst/>
@@ -15182,7 +15096,7 @@
         <p:spPr>
           <a:xfrm>
             <a:off x="4983480" y="1801440"/>
-            <a:ext cx="959760" cy="273960"/>
+            <a:ext cx="959400" cy="273600"/>
           </a:xfrm>
           <a:prstGeom prst="rect">
             <a:avLst/>
@@ -15237,7 +15151,7 @@
         <p:spPr>
           <a:xfrm>
             <a:off x="4983480" y="2030040"/>
-            <a:ext cx="3657240" cy="365400"/>
+            <a:ext cx="3656880" cy="365040"/>
           </a:xfrm>
           <a:prstGeom prst="rect">
             <a:avLst/>
@@ -15292,7 +15206,7 @@
         <p:spPr>
           <a:xfrm>
             <a:off x="4983480" y="2423160"/>
-            <a:ext cx="3565800" cy="13320"/>
+            <a:ext cx="3565440" cy="12960"/>
           </a:xfrm>
           <a:prstGeom prst="rect">
             <a:avLst/>
@@ -15320,7 +15234,7 @@
         <p:spPr>
           <a:xfrm>
             <a:off x="4983480" y="2496240"/>
-            <a:ext cx="959760" cy="273960"/>
+            <a:ext cx="959400" cy="273600"/>
           </a:xfrm>
           <a:prstGeom prst="rect">
             <a:avLst/>
@@ -15375,7 +15289,7 @@
         <p:spPr>
           <a:xfrm>
             <a:off x="4983480" y="2724840"/>
-            <a:ext cx="3657240" cy="365400"/>
+            <a:ext cx="3656880" cy="365040"/>
           </a:xfrm>
           <a:prstGeom prst="rect">
             <a:avLst/>
@@ -15430,7 +15344,7 @@
         <p:spPr>
           <a:xfrm>
             <a:off x="4983480" y="3117960"/>
-            <a:ext cx="3565800" cy="13320"/>
+            <a:ext cx="3565440" cy="12960"/>
           </a:xfrm>
           <a:prstGeom prst="rect">
             <a:avLst/>
@@ -15458,7 +15372,7 @@
         <p:spPr>
           <a:xfrm>
             <a:off x="4983480" y="3191400"/>
-            <a:ext cx="959760" cy="273960"/>
+            <a:ext cx="959400" cy="273600"/>
           </a:xfrm>
           <a:prstGeom prst="rect">
             <a:avLst/>
@@ -15513,7 +15427,7 @@
         <p:spPr>
           <a:xfrm>
             <a:off x="4983480" y="3420000"/>
-            <a:ext cx="3657240" cy="365400"/>
+            <a:ext cx="3656880" cy="365040"/>
           </a:xfrm>
           <a:prstGeom prst="rect">
             <a:avLst/>
@@ -15568,7 +15482,7 @@
         <p:spPr>
           <a:xfrm>
             <a:off x="4983480" y="3813120"/>
-            <a:ext cx="3565800" cy="13320"/>
+            <a:ext cx="3565440" cy="12960"/>
           </a:xfrm>
           <a:prstGeom prst="rect">
             <a:avLst/>
@@ -15596,7 +15510,7 @@
         <p:spPr>
           <a:xfrm>
             <a:off x="4983480" y="3886200"/>
-            <a:ext cx="959760" cy="273960"/>
+            <a:ext cx="959400" cy="273600"/>
           </a:xfrm>
           <a:prstGeom prst="rect">
             <a:avLst/>
@@ -15651,7 +15565,7 @@
         <p:spPr>
           <a:xfrm>
             <a:off x="4983480" y="4114800"/>
-            <a:ext cx="3657240" cy="365400"/>
+            <a:ext cx="3656880" cy="365040"/>
           </a:xfrm>
           <a:prstGeom prst="rect">
             <a:avLst/>
@@ -15706,7 +15620,7 @@
         <p:spPr>
           <a:xfrm>
             <a:off x="320040" y="4800600"/>
-            <a:ext cx="8503560" cy="292320"/>
+            <a:ext cx="8503200" cy="291960"/>
           </a:xfrm>
           <a:prstGeom prst="rect">
             <a:avLst/>
@@ -15740,7 +15654,7 @@
         <p:spPr>
           <a:xfrm>
             <a:off x="384120" y="4827960"/>
-            <a:ext cx="200880" cy="200880"/>
+            <a:ext cx="200520" cy="200520"/>
           </a:xfrm>
           <a:prstGeom prst="rect">
             <a:avLst/>
@@ -15759,7 +15673,7 @@
         <p:spPr>
           <a:xfrm>
             <a:off x="658440" y="4827960"/>
-            <a:ext cx="8046360" cy="237240"/>
+            <a:ext cx="8046000" cy="236880"/>
           </a:xfrm>
           <a:prstGeom prst="rect">
             <a:avLst/>
@@ -15851,7 +15765,7 @@
         <p:spPr>
           <a:xfrm>
             <a:off x="0" y="0"/>
-            <a:ext cx="9143640" cy="959760"/>
+            <a:ext cx="9143280" cy="959400"/>
           </a:xfrm>
           <a:prstGeom prst="rect">
             <a:avLst/>
@@ -15879,7 +15793,7 @@
         <p:spPr>
           <a:xfrm>
             <a:off x="0" y="960120"/>
-            <a:ext cx="9143640" cy="54360"/>
+            <a:ext cx="9143280" cy="54000"/>
           </a:xfrm>
           <a:prstGeom prst="rect">
             <a:avLst/>
@@ -15911,7 +15825,7 @@
         <p:spPr>
           <a:xfrm>
             <a:off x="320040" y="182880"/>
-            <a:ext cx="548280" cy="548280"/>
+            <a:ext cx="547920" cy="547920"/>
           </a:xfrm>
           <a:prstGeom prst="rect">
             <a:avLst/>
@@ -15930,7 +15844,7 @@
         <p:spPr>
           <a:xfrm>
             <a:off x="1005840" y="182880"/>
-            <a:ext cx="7772040" cy="594000"/>
+            <a:ext cx="7771680" cy="593640"/>
           </a:xfrm>
           <a:prstGeom prst="rect">
             <a:avLst/>
@@ -15985,7 +15899,7 @@
         <p:spPr>
           <a:xfrm>
             <a:off x="320040" y="1115640"/>
-            <a:ext cx="4114440" cy="347040"/>
+            <a:ext cx="4114080" cy="346680"/>
           </a:xfrm>
           <a:prstGeom prst="rect">
             <a:avLst/>
@@ -16040,7 +15954,7 @@
         <p:spPr>
           <a:xfrm>
             <a:off x="320040" y="1536120"/>
-            <a:ext cx="310680" cy="310680"/>
+            <a:ext cx="310320" cy="310320"/>
           </a:xfrm>
           <a:prstGeom prst="ellipse">
             <a:avLst/>
@@ -16068,7 +15982,7 @@
         <p:spPr>
           <a:xfrm>
             <a:off x="320040" y="1536120"/>
-            <a:ext cx="310680" cy="310680"/>
+            <a:ext cx="310320" cy="310320"/>
           </a:xfrm>
           <a:prstGeom prst="rect">
             <a:avLst/>
@@ -16104,6 +16018,7 @@
                   <a:srgbClr val="0d1b2a"/>
                 </a:solidFill>
                 <a:latin typeface="Calibri"/>
+                <a:ea typeface="DejaVu Sans"/>
               </a:rPr>
               <a:t>1</a:t>
             </a:r>
@@ -16122,7 +16037,7 @@
         <p:spPr>
           <a:xfrm>
             <a:off x="731520" y="1536120"/>
-            <a:ext cx="3565800" cy="347040"/>
+            <a:ext cx="3565440" cy="346680"/>
           </a:xfrm>
           <a:prstGeom prst="rect">
             <a:avLst/>
@@ -16177,7 +16092,7 @@
         <p:spPr>
           <a:xfrm>
             <a:off x="320040" y="2030040"/>
-            <a:ext cx="310680" cy="310680"/>
+            <a:ext cx="310320" cy="310320"/>
           </a:xfrm>
           <a:prstGeom prst="ellipse">
             <a:avLst/>
@@ -16205,7 +16120,7 @@
         <p:spPr>
           <a:xfrm>
             <a:off x="320040" y="2030040"/>
-            <a:ext cx="310680" cy="310680"/>
+            <a:ext cx="310320" cy="310320"/>
           </a:xfrm>
           <a:prstGeom prst="rect">
             <a:avLst/>
@@ -16241,6 +16156,7 @@
                   <a:srgbClr val="0d1b2a"/>
                 </a:solidFill>
                 <a:latin typeface="Calibri"/>
+                <a:ea typeface="DejaVu Sans"/>
               </a:rPr>
               <a:t>2</a:t>
             </a:r>
@@ -16259,7 +16175,7 @@
         <p:spPr>
           <a:xfrm>
             <a:off x="731520" y="2030040"/>
-            <a:ext cx="3565800" cy="347040"/>
+            <a:ext cx="3565440" cy="346680"/>
           </a:xfrm>
           <a:prstGeom prst="rect">
             <a:avLst/>
@@ -16314,7 +16230,7 @@
         <p:spPr>
           <a:xfrm>
             <a:off x="320040" y="2523600"/>
-            <a:ext cx="310680" cy="310680"/>
+            <a:ext cx="310320" cy="310320"/>
           </a:xfrm>
           <a:prstGeom prst="ellipse">
             <a:avLst/>
@@ -16342,7 +16258,7 @@
         <p:spPr>
           <a:xfrm>
             <a:off x="320040" y="2523600"/>
-            <a:ext cx="310680" cy="310680"/>
+            <a:ext cx="310320" cy="310320"/>
           </a:xfrm>
           <a:prstGeom prst="rect">
             <a:avLst/>
@@ -16378,6 +16294,7 @@
                   <a:srgbClr val="0d1b2a"/>
                 </a:solidFill>
                 <a:latin typeface="Calibri"/>
+                <a:ea typeface="DejaVu Sans"/>
               </a:rPr>
               <a:t>3</a:t>
             </a:r>
@@ -16396,7 +16313,7 @@
         <p:spPr>
           <a:xfrm>
             <a:off x="731520" y="2523600"/>
-            <a:ext cx="3565800" cy="347040"/>
+            <a:ext cx="3565440" cy="346680"/>
           </a:xfrm>
           <a:prstGeom prst="rect">
             <a:avLst/>
@@ -16451,7 +16368,7 @@
         <p:spPr>
           <a:xfrm>
             <a:off x="320040" y="3017520"/>
-            <a:ext cx="310680" cy="310680"/>
+            <a:ext cx="310320" cy="310320"/>
           </a:xfrm>
           <a:prstGeom prst="ellipse">
             <a:avLst/>
@@ -16479,7 +16396,7 @@
         <p:spPr>
           <a:xfrm>
             <a:off x="320040" y="3017520"/>
-            <a:ext cx="310680" cy="310680"/>
+            <a:ext cx="310320" cy="310320"/>
           </a:xfrm>
           <a:prstGeom prst="rect">
             <a:avLst/>
@@ -16515,6 +16432,7 @@
                   <a:srgbClr val="0d1b2a"/>
                 </a:solidFill>
                 <a:latin typeface="Calibri"/>
+                <a:ea typeface="DejaVu Sans"/>
               </a:rPr>
               <a:t>4</a:t>
             </a:r>
@@ -16533,7 +16451,7 @@
         <p:spPr>
           <a:xfrm>
             <a:off x="731520" y="3017520"/>
-            <a:ext cx="3565800" cy="347040"/>
+            <a:ext cx="3565440" cy="346680"/>
           </a:xfrm>
           <a:prstGeom prst="rect">
             <a:avLst/>
@@ -16588,7 +16506,7 @@
         <p:spPr>
           <a:xfrm>
             <a:off x="4572000" y="1097280"/>
-            <a:ext cx="4251600" cy="1188360"/>
+            <a:ext cx="4251240" cy="1188000"/>
           </a:xfrm>
           <a:prstGeom prst="rect">
             <a:avLst/>
@@ -16623,7 +16541,7 @@
         <p:spPr>
           <a:xfrm>
             <a:off x="4681800" y="1170360"/>
-            <a:ext cx="3931560" cy="255600"/>
+            <a:ext cx="3931200" cy="255240"/>
           </a:xfrm>
           <a:prstGeom prst="rect">
             <a:avLst/>
@@ -16678,7 +16596,7 @@
         <p:spPr>
           <a:xfrm>
             <a:off x="4681800" y="1417320"/>
-            <a:ext cx="4023000" cy="776880"/>
+            <a:ext cx="4022640" cy="776520"/>
           </a:xfrm>
           <a:prstGeom prst="rect">
             <a:avLst/>
@@ -16757,7 +16675,7 @@
         <p:spPr>
           <a:xfrm>
             <a:off x="4572000" y="2423160"/>
-            <a:ext cx="4251600" cy="1508400"/>
+            <a:ext cx="4251240" cy="1508040"/>
           </a:xfrm>
           <a:prstGeom prst="rect">
             <a:avLst/>
@@ -16792,7 +16710,7 @@
         <p:spPr>
           <a:xfrm>
             <a:off x="4681800" y="2487240"/>
-            <a:ext cx="3931560" cy="255600"/>
+            <a:ext cx="3931200" cy="255240"/>
           </a:xfrm>
           <a:prstGeom prst="rect">
             <a:avLst/>
@@ -16847,7 +16765,7 @@
         <p:spPr>
           <a:xfrm>
             <a:off x="4681800" y="2724840"/>
-            <a:ext cx="4023000" cy="1115280"/>
+            <a:ext cx="4022640" cy="1114920"/>
           </a:xfrm>
           <a:prstGeom prst="rect">
             <a:avLst/>
@@ -17008,7 +16926,7 @@
         <p:spPr>
           <a:xfrm>
             <a:off x="4572000" y="4041720"/>
-            <a:ext cx="4251600" cy="685440"/>
+            <a:ext cx="4251240" cy="685080"/>
           </a:xfrm>
           <a:prstGeom prst="rect">
             <a:avLst/>
@@ -17038,7 +16956,7 @@
         <p:spPr>
           <a:xfrm>
             <a:off x="4572000" y="4041720"/>
-            <a:ext cx="54360" cy="685440"/>
+            <a:ext cx="54000" cy="685080"/>
           </a:xfrm>
           <a:prstGeom prst="rect">
             <a:avLst/>
@@ -17070,7 +16988,7 @@
         <p:spPr>
           <a:xfrm>
             <a:off x="4681800" y="4151520"/>
-            <a:ext cx="200880" cy="200880"/>
+            <a:ext cx="200520" cy="200520"/>
           </a:xfrm>
           <a:prstGeom prst="rect">
             <a:avLst/>
@@ -17089,7 +17007,7 @@
         <p:spPr>
           <a:xfrm>
             <a:off x="4937760" y="4114800"/>
-            <a:ext cx="3794400" cy="502560"/>
+            <a:ext cx="3794040" cy="502200"/>
           </a:xfrm>
           <a:prstGeom prst="rect">
             <a:avLst/>
@@ -17181,7 +17099,7 @@
         <p:spPr>
           <a:xfrm>
             <a:off x="0" y="0"/>
-            <a:ext cx="9143640" cy="5143320"/>
+            <a:ext cx="9143280" cy="5142960"/>
           </a:xfrm>
           <a:prstGeom prst="rect">
             <a:avLst/>
@@ -17209,7 +17127,7 @@
         <p:spPr>
           <a:xfrm>
             <a:off x="-1371600" y="-1371600"/>
-            <a:ext cx="4571640" cy="4571640"/>
+            <a:ext cx="4571280" cy="4571280"/>
           </a:xfrm>
           <a:prstGeom prst="ellipse">
             <a:avLst/>
@@ -17237,7 +17155,7 @@
         <p:spPr>
           <a:xfrm>
             <a:off x="5943600" y="2286000"/>
-            <a:ext cx="4114440" cy="4114440"/>
+            <a:ext cx="4114080" cy="4114080"/>
           </a:xfrm>
           <a:prstGeom prst="ellipse">
             <a:avLst/>
@@ -17265,7 +17183,7 @@
         <p:spPr>
           <a:xfrm>
             <a:off x="4023360" y="2103120"/>
-            <a:ext cx="1096920" cy="54360"/>
+            <a:ext cx="1096560" cy="54000"/>
           </a:xfrm>
           <a:prstGeom prst="rect">
             <a:avLst/>
@@ -17293,7 +17211,7 @@
         <p:spPr>
           <a:xfrm>
             <a:off x="4023360" y="1554480"/>
-            <a:ext cx="4571640" cy="411120"/>
+            <a:ext cx="4571280" cy="410760"/>
           </a:xfrm>
           <a:prstGeom prst="rect">
             <a:avLst/>
@@ -17324,7 +17242,7 @@
               </a:tabLst>
             </a:pPr>
             <a:r>
-              <a:rPr b="1" lang="en-US" sz="1300" spc="599" strike="noStrike">
+              <a:rPr b="1" lang="en-US" sz="1300" spc="596" strike="noStrike">
                 <a:solidFill>
                   <a:srgbClr val="48cae4"/>
                 </a:solidFill>
@@ -17348,7 +17266,7 @@
         <p:spPr>
           <a:xfrm>
             <a:off x="4023360" y="2194560"/>
-            <a:ext cx="4754520" cy="1096920"/>
+            <a:ext cx="4754160" cy="1096560"/>
           </a:xfrm>
           <a:prstGeom prst="rect">
             <a:avLst/>
@@ -17427,7 +17345,7 @@
         <p:spPr>
           <a:xfrm>
             <a:off x="4023360" y="3383280"/>
-            <a:ext cx="4754520" cy="822600"/>
+            <a:ext cx="4754160" cy="822240"/>
           </a:xfrm>
           <a:prstGeom prst="rect">
             <a:avLst/>
@@ -17486,7 +17404,7 @@
         <p:spPr>
           <a:xfrm>
             <a:off x="1005840" y="1463040"/>
-            <a:ext cx="1462680" cy="1462680"/>
+            <a:ext cx="1462320" cy="1462320"/>
           </a:xfrm>
           <a:prstGeom prst="rect">
             <a:avLst/>
@@ -17542,7 +17460,7 @@
         <p:spPr>
           <a:xfrm>
             <a:off x="0" y="0"/>
-            <a:ext cx="9143640" cy="959760"/>
+            <a:ext cx="9143280" cy="959400"/>
           </a:xfrm>
           <a:prstGeom prst="rect">
             <a:avLst/>
@@ -17570,7 +17488,7 @@
         <p:spPr>
           <a:xfrm>
             <a:off x="0" y="960120"/>
-            <a:ext cx="9143640" cy="54360"/>
+            <a:ext cx="9143280" cy="54000"/>
           </a:xfrm>
           <a:prstGeom prst="rect">
             <a:avLst/>
@@ -17598,7 +17516,7 @@
         <p:spPr>
           <a:xfrm>
             <a:off x="411480" y="182880"/>
-            <a:ext cx="8229240" cy="594000"/>
+            <a:ext cx="8228880" cy="593640"/>
           </a:xfrm>
           <a:prstGeom prst="rect">
             <a:avLst/>
@@ -17653,7 +17571,7 @@
         <p:spPr>
           <a:xfrm>
             <a:off x="320040" y="1115640"/>
-            <a:ext cx="2742840" cy="3702960"/>
+            <a:ext cx="2742480" cy="3702600"/>
           </a:xfrm>
           <a:prstGeom prst="rect">
             <a:avLst/>
@@ -17688,7 +17606,7 @@
         <p:spPr>
           <a:xfrm>
             <a:off x="320040" y="1115640"/>
-            <a:ext cx="2742840" cy="639720"/>
+            <a:ext cx="2742480" cy="639360"/>
           </a:xfrm>
           <a:prstGeom prst="rect">
             <a:avLst/>
@@ -17720,7 +17638,7 @@
         <p:spPr>
           <a:xfrm>
             <a:off x="429840" y="1207080"/>
-            <a:ext cx="383760" cy="383760"/>
+            <a:ext cx="383400" cy="383400"/>
           </a:xfrm>
           <a:prstGeom prst="rect">
             <a:avLst/>
@@ -17739,7 +17657,7 @@
         <p:spPr>
           <a:xfrm>
             <a:off x="887040" y="1170360"/>
-            <a:ext cx="2102760" cy="292320"/>
+            <a:ext cx="2102400" cy="291960"/>
           </a:xfrm>
           <a:prstGeom prst="rect">
             <a:avLst/>
@@ -17794,7 +17712,7 @@
         <p:spPr>
           <a:xfrm>
             <a:off x="887040" y="1426320"/>
-            <a:ext cx="2102760" cy="255600"/>
+            <a:ext cx="2102400" cy="255240"/>
           </a:xfrm>
           <a:prstGeom prst="rect">
             <a:avLst/>
@@ -17849,7 +17767,7 @@
         <p:spPr>
           <a:xfrm>
             <a:off x="457200" y="1874520"/>
-            <a:ext cx="2468520" cy="255600"/>
+            <a:ext cx="2468160" cy="255240"/>
           </a:xfrm>
           <a:prstGeom prst="rect">
             <a:avLst/>
@@ -17880,7 +17798,7 @@
               </a:tabLst>
             </a:pPr>
             <a:r>
-              <a:rPr b="1" lang="en-US" sz="1000" spc="199" strike="noStrike">
+              <a:rPr b="1" lang="en-US" sz="1000" spc="197" strike="noStrike">
                 <a:solidFill>
                   <a:srgbClr val="0096c7"/>
                 </a:solidFill>
@@ -17908,7 +17826,7 @@
         <p:spPr>
           <a:xfrm>
             <a:off x="484560" y="2176200"/>
-            <a:ext cx="200880" cy="200880"/>
+            <a:ext cx="200520" cy="200520"/>
           </a:xfrm>
           <a:prstGeom prst="rect">
             <a:avLst/>
@@ -17927,7 +17845,7 @@
         <p:spPr>
           <a:xfrm>
             <a:off x="758880" y="2167200"/>
-            <a:ext cx="2194200" cy="255600"/>
+            <a:ext cx="2193840" cy="255240"/>
           </a:xfrm>
           <a:prstGeom prst="rect">
             <a:avLst/>
@@ -17986,7 +17904,7 @@
         <p:spPr>
           <a:xfrm>
             <a:off x="484560" y="2597040"/>
-            <a:ext cx="200880" cy="200880"/>
+            <a:ext cx="200520" cy="200520"/>
           </a:xfrm>
           <a:prstGeom prst="rect">
             <a:avLst/>
@@ -18005,7 +17923,7 @@
         <p:spPr>
           <a:xfrm>
             <a:off x="758880" y="2587680"/>
-            <a:ext cx="2194200" cy="255600"/>
+            <a:ext cx="2193840" cy="255240"/>
           </a:xfrm>
           <a:prstGeom prst="rect">
             <a:avLst/>
@@ -18060,7 +17978,7 @@
         <p:spPr>
           <a:xfrm>
             <a:off x="457200" y="3182040"/>
-            <a:ext cx="2468520" cy="255600"/>
+            <a:ext cx="2468160" cy="255240"/>
           </a:xfrm>
           <a:prstGeom prst="rect">
             <a:avLst/>
@@ -18091,7 +18009,7 @@
               </a:tabLst>
             </a:pPr>
             <a:r>
-              <a:rPr b="1" lang="en-US" sz="1000" spc="199" strike="noStrike">
+              <a:rPr b="1" lang="en-US" sz="1000" spc="197" strike="noStrike">
                 <a:solidFill>
                   <a:srgbClr val="ef476f"/>
                 </a:solidFill>
@@ -18119,7 +18037,7 @@
         <p:spPr>
           <a:xfrm>
             <a:off x="484560" y="3493080"/>
-            <a:ext cx="200880" cy="200880"/>
+            <a:ext cx="200520" cy="200520"/>
           </a:xfrm>
           <a:prstGeom prst="rect">
             <a:avLst/>
@@ -18138,7 +18056,7 @@
         <p:spPr>
           <a:xfrm>
             <a:off x="758880" y="3483720"/>
-            <a:ext cx="2194200" cy="255600"/>
+            <a:ext cx="2193840" cy="255240"/>
           </a:xfrm>
           <a:prstGeom prst="rect">
             <a:avLst/>
@@ -18197,7 +18115,7 @@
         <p:spPr>
           <a:xfrm>
             <a:off x="484560" y="3877200"/>
-            <a:ext cx="200880" cy="200880"/>
+            <a:ext cx="200520" cy="200520"/>
           </a:xfrm>
           <a:prstGeom prst="rect">
             <a:avLst/>
@@ -18216,7 +18134,7 @@
         <p:spPr>
           <a:xfrm>
             <a:off x="758880" y="3867840"/>
-            <a:ext cx="2194200" cy="255600"/>
+            <a:ext cx="2193840" cy="255240"/>
           </a:xfrm>
           <a:prstGeom prst="rect">
             <a:avLst/>
@@ -18271,7 +18189,7 @@
         <p:spPr>
           <a:xfrm>
             <a:off x="3246120" y="1115640"/>
-            <a:ext cx="2742840" cy="3702960"/>
+            <a:ext cx="2742480" cy="3702600"/>
           </a:xfrm>
           <a:prstGeom prst="rect">
             <a:avLst/>
@@ -18306,7 +18224,7 @@
         <p:spPr>
           <a:xfrm>
             <a:off x="3246120" y="1115640"/>
-            <a:ext cx="2742840" cy="639720"/>
+            <a:ext cx="2742480" cy="639360"/>
           </a:xfrm>
           <a:prstGeom prst="rect">
             <a:avLst/>
@@ -18338,7 +18256,7 @@
         <p:spPr>
           <a:xfrm>
             <a:off x="3355920" y="1207080"/>
-            <a:ext cx="383760" cy="383760"/>
+            <a:ext cx="383400" cy="383400"/>
           </a:xfrm>
           <a:prstGeom prst="rect">
             <a:avLst/>
@@ -18357,7 +18275,7 @@
         <p:spPr>
           <a:xfrm>
             <a:off x="3813120" y="1170360"/>
-            <a:ext cx="2102760" cy="292320"/>
+            <a:ext cx="2102400" cy="291960"/>
           </a:xfrm>
           <a:prstGeom prst="rect">
             <a:avLst/>
@@ -18412,7 +18330,7 @@
         <p:spPr>
           <a:xfrm>
             <a:off x="3813120" y="1426320"/>
-            <a:ext cx="2102760" cy="255600"/>
+            <a:ext cx="2102400" cy="255240"/>
           </a:xfrm>
           <a:prstGeom prst="rect">
             <a:avLst/>
@@ -18467,7 +18385,7 @@
         <p:spPr>
           <a:xfrm>
             <a:off x="3383280" y="1874520"/>
-            <a:ext cx="2468520" cy="255600"/>
+            <a:ext cx="2468160" cy="255240"/>
           </a:xfrm>
           <a:prstGeom prst="rect">
             <a:avLst/>
@@ -18498,7 +18416,7 @@
               </a:tabLst>
             </a:pPr>
             <a:r>
-              <a:rPr b="1" lang="en-US" sz="1000" spc="199" strike="noStrike">
+              <a:rPr b="1" lang="en-US" sz="1000" spc="197" strike="noStrike">
                 <a:solidFill>
                   <a:srgbClr val="06d6a0"/>
                 </a:solidFill>
@@ -18526,7 +18444,7 @@
         <p:spPr>
           <a:xfrm>
             <a:off x="3410640" y="2176200"/>
-            <a:ext cx="200880" cy="200880"/>
+            <a:ext cx="200520" cy="200520"/>
           </a:xfrm>
           <a:prstGeom prst="rect">
             <a:avLst/>
@@ -18545,7 +18463,7 @@
         <p:spPr>
           <a:xfrm>
             <a:off x="3684960" y="2167200"/>
-            <a:ext cx="2194200" cy="255600"/>
+            <a:ext cx="2193840" cy="255240"/>
           </a:xfrm>
           <a:prstGeom prst="rect">
             <a:avLst/>
@@ -18604,7 +18522,7 @@
         <p:spPr>
           <a:xfrm>
             <a:off x="3410640" y="2597040"/>
-            <a:ext cx="200880" cy="200880"/>
+            <a:ext cx="200520" cy="200520"/>
           </a:xfrm>
           <a:prstGeom prst="rect">
             <a:avLst/>
@@ -18623,7 +18541,7 @@
         <p:spPr>
           <a:xfrm>
             <a:off x="3684960" y="2587680"/>
-            <a:ext cx="2194200" cy="255600"/>
+            <a:ext cx="2193840" cy="255240"/>
           </a:xfrm>
           <a:prstGeom prst="rect">
             <a:avLst/>
@@ -18682,7 +18600,7 @@
         <p:spPr>
           <a:xfrm>
             <a:off x="3410640" y="3017520"/>
-            <a:ext cx="200880" cy="200880"/>
+            <a:ext cx="200520" cy="200520"/>
           </a:xfrm>
           <a:prstGeom prst="rect">
             <a:avLst/>
@@ -18701,7 +18619,7 @@
         <p:spPr>
           <a:xfrm>
             <a:off x="3684960" y="3008520"/>
-            <a:ext cx="2194200" cy="255600"/>
+            <a:ext cx="2193840" cy="255240"/>
           </a:xfrm>
           <a:prstGeom prst="rect">
             <a:avLst/>
@@ -18756,7 +18674,7 @@
         <p:spPr>
           <a:xfrm>
             <a:off x="3383280" y="3602880"/>
-            <a:ext cx="2468520" cy="255600"/>
+            <a:ext cx="2468160" cy="255240"/>
           </a:xfrm>
           <a:prstGeom prst="rect">
             <a:avLst/>
@@ -18787,7 +18705,7 @@
               </a:tabLst>
             </a:pPr>
             <a:r>
-              <a:rPr b="1" lang="en-US" sz="1000" spc="199" strike="noStrike">
+              <a:rPr b="1" lang="en-US" sz="1000" spc="197" strike="noStrike">
                 <a:solidFill>
                   <a:srgbClr val="ef476f"/>
                 </a:solidFill>
@@ -18815,7 +18733,7 @@
         <p:spPr>
           <a:xfrm>
             <a:off x="3410640" y="3913560"/>
-            <a:ext cx="200880" cy="200880"/>
+            <a:ext cx="200520" cy="200520"/>
           </a:xfrm>
           <a:prstGeom prst="rect">
             <a:avLst/>
@@ -18834,7 +18752,7 @@
         <p:spPr>
           <a:xfrm>
             <a:off x="3684960" y="3904560"/>
-            <a:ext cx="2194200" cy="255600"/>
+            <a:ext cx="2193840" cy="255240"/>
           </a:xfrm>
           <a:prstGeom prst="rect">
             <a:avLst/>
@@ -18889,7 +18807,7 @@
         <p:spPr>
           <a:xfrm>
             <a:off x="6172200" y="1115640"/>
-            <a:ext cx="2742840" cy="3702960"/>
+            <a:ext cx="2742480" cy="3702600"/>
           </a:xfrm>
           <a:prstGeom prst="rect">
             <a:avLst/>
@@ -18924,7 +18842,7 @@
         <p:spPr>
           <a:xfrm>
             <a:off x="6172200" y="1115640"/>
-            <a:ext cx="2742840" cy="639720"/>
+            <a:ext cx="2742480" cy="639360"/>
           </a:xfrm>
           <a:prstGeom prst="rect">
             <a:avLst/>
@@ -18956,7 +18874,7 @@
         <p:spPr>
           <a:xfrm>
             <a:off x="6282000" y="1207080"/>
-            <a:ext cx="383760" cy="383760"/>
+            <a:ext cx="383400" cy="383400"/>
           </a:xfrm>
           <a:prstGeom prst="rect">
             <a:avLst/>
@@ -18975,7 +18893,7 @@
         <p:spPr>
           <a:xfrm>
             <a:off x="6739200" y="1170360"/>
-            <a:ext cx="2102760" cy="292320"/>
+            <a:ext cx="2102400" cy="291960"/>
           </a:xfrm>
           <a:prstGeom prst="rect">
             <a:avLst/>
@@ -19030,7 +18948,7 @@
         <p:spPr>
           <a:xfrm>
             <a:off x="6739200" y="1426320"/>
-            <a:ext cx="2102760" cy="255600"/>
+            <a:ext cx="2102400" cy="255240"/>
           </a:xfrm>
           <a:prstGeom prst="rect">
             <a:avLst/>
@@ -19085,7 +19003,7 @@
         <p:spPr>
           <a:xfrm>
             <a:off x="6309360" y="1874520"/>
-            <a:ext cx="2468520" cy="255600"/>
+            <a:ext cx="2468160" cy="255240"/>
           </a:xfrm>
           <a:prstGeom prst="rect">
             <a:avLst/>
@@ -19116,7 +19034,7 @@
               </a:tabLst>
             </a:pPr>
             <a:r>
-              <a:rPr b="1" lang="en-US" sz="1000" spc="199" strike="noStrike">
+              <a:rPr b="1" lang="en-US" sz="1000" spc="197" strike="noStrike">
                 <a:solidFill>
                   <a:srgbClr val="f4a261"/>
                 </a:solidFill>
@@ -19144,7 +19062,7 @@
         <p:spPr>
           <a:xfrm>
             <a:off x="6336720" y="2176200"/>
-            <a:ext cx="200880" cy="200880"/>
+            <a:ext cx="200520" cy="200520"/>
           </a:xfrm>
           <a:prstGeom prst="rect">
             <a:avLst/>
@@ -19163,7 +19081,7 @@
         <p:spPr>
           <a:xfrm>
             <a:off x="6611040" y="2167200"/>
-            <a:ext cx="2194200" cy="255600"/>
+            <a:ext cx="2193840" cy="255240"/>
           </a:xfrm>
           <a:prstGeom prst="rect">
             <a:avLst/>
@@ -19222,7 +19140,7 @@
         <p:spPr>
           <a:xfrm>
             <a:off x="6336720" y="2597040"/>
-            <a:ext cx="200880" cy="200880"/>
+            <a:ext cx="200520" cy="200520"/>
           </a:xfrm>
           <a:prstGeom prst="rect">
             <a:avLst/>
@@ -19241,7 +19159,7 @@
         <p:spPr>
           <a:xfrm>
             <a:off x="6611040" y="2587680"/>
-            <a:ext cx="2194200" cy="255600"/>
+            <a:ext cx="2193840" cy="255240"/>
           </a:xfrm>
           <a:prstGeom prst="rect">
             <a:avLst/>
@@ -19296,7 +19214,7 @@
         <p:spPr>
           <a:xfrm>
             <a:off x="6309360" y="3182040"/>
-            <a:ext cx="2468520" cy="255600"/>
+            <a:ext cx="2468160" cy="255240"/>
           </a:xfrm>
           <a:prstGeom prst="rect">
             <a:avLst/>
@@ -19327,7 +19245,7 @@
               </a:tabLst>
             </a:pPr>
             <a:r>
-              <a:rPr b="1" lang="en-US" sz="1000" spc="199" strike="noStrike">
+              <a:rPr b="1" lang="en-US" sz="1000" spc="197" strike="noStrike">
                 <a:solidFill>
                   <a:srgbClr val="ef476f"/>
                 </a:solidFill>
@@ -19355,7 +19273,7 @@
         <p:spPr>
           <a:xfrm>
             <a:off x="6336720" y="3493080"/>
-            <a:ext cx="200880" cy="200880"/>
+            <a:ext cx="200520" cy="200520"/>
           </a:xfrm>
           <a:prstGeom prst="rect">
             <a:avLst/>
@@ -19374,7 +19292,7 @@
         <p:spPr>
           <a:xfrm>
             <a:off x="6611040" y="3483720"/>
-            <a:ext cx="2194200" cy="255600"/>
+            <a:ext cx="2193840" cy="255240"/>
           </a:xfrm>
           <a:prstGeom prst="rect">
             <a:avLst/>
@@ -19433,7 +19351,7 @@
         <p:spPr>
           <a:xfrm>
             <a:off x="6336720" y="3877200"/>
-            <a:ext cx="200880" cy="200880"/>
+            <a:ext cx="200520" cy="200520"/>
           </a:xfrm>
           <a:prstGeom prst="rect">
             <a:avLst/>
@@ -19452,7 +19370,7 @@
         <p:spPr>
           <a:xfrm>
             <a:off x="6611040" y="3867840"/>
-            <a:ext cx="2194200" cy="255600"/>
+            <a:ext cx="2193840" cy="255240"/>
           </a:xfrm>
           <a:prstGeom prst="rect">
             <a:avLst/>
@@ -19507,7 +19425,7 @@
         <p:spPr>
           <a:xfrm>
             <a:off x="320040" y="4846320"/>
-            <a:ext cx="8503560" cy="246600"/>
+            <a:ext cx="8503200" cy="246240"/>
           </a:xfrm>
           <a:prstGeom prst="rect">
             <a:avLst/>
@@ -19537,7 +19455,7 @@
         <p:spPr>
           <a:xfrm>
             <a:off x="457200" y="4873680"/>
-            <a:ext cx="8320680" cy="182520"/>
+            <a:ext cx="8320320" cy="182160"/>
           </a:xfrm>
           <a:prstGeom prst="rect">
             <a:avLst/>
@@ -19629,7 +19547,7 @@
         <p:spPr>
           <a:xfrm>
             <a:off x="0" y="0"/>
-            <a:ext cx="9143640" cy="5143320"/>
+            <a:ext cx="9143280" cy="5142960"/>
           </a:xfrm>
           <a:prstGeom prst="rect">
             <a:avLst/>
@@ -19657,7 +19575,7 @@
         <p:spPr>
           <a:xfrm>
             <a:off x="-1371600" y="-1371600"/>
-            <a:ext cx="4571640" cy="4571640"/>
+            <a:ext cx="4571280" cy="4571280"/>
           </a:xfrm>
           <a:prstGeom prst="ellipse">
             <a:avLst/>
@@ -19685,7 +19603,7 @@
         <p:spPr>
           <a:xfrm>
             <a:off x="5943600" y="2286000"/>
-            <a:ext cx="4114440" cy="4114440"/>
+            <a:ext cx="4114080" cy="4114080"/>
           </a:xfrm>
           <a:prstGeom prst="ellipse">
             <a:avLst/>
@@ -19713,7 +19631,7 @@
         <p:spPr>
           <a:xfrm>
             <a:off x="4023360" y="2103120"/>
-            <a:ext cx="1096920" cy="54360"/>
+            <a:ext cx="1096560" cy="54000"/>
           </a:xfrm>
           <a:prstGeom prst="rect">
             <a:avLst/>
@@ -19741,7 +19659,7 @@
         <p:spPr>
           <a:xfrm>
             <a:off x="4023360" y="1554480"/>
-            <a:ext cx="4571640" cy="411120"/>
+            <a:ext cx="4571280" cy="410760"/>
           </a:xfrm>
           <a:prstGeom prst="rect">
             <a:avLst/>
@@ -19772,7 +19690,7 @@
               </a:tabLst>
             </a:pPr>
             <a:r>
-              <a:rPr b="1" lang="en-US" sz="1300" spc="599" strike="noStrike">
+              <a:rPr b="1" lang="en-US" sz="1300" spc="596" strike="noStrike">
                 <a:solidFill>
                   <a:srgbClr val="48cae4"/>
                 </a:solidFill>
@@ -19796,7 +19714,7 @@
         <p:spPr>
           <a:xfrm>
             <a:off x="4023360" y="2194560"/>
-            <a:ext cx="4754520" cy="1096920"/>
+            <a:ext cx="4754160" cy="1096560"/>
           </a:xfrm>
           <a:prstGeom prst="rect">
             <a:avLst/>
@@ -19851,7 +19769,7 @@
         <p:spPr>
           <a:xfrm>
             <a:off x="4023360" y="3383280"/>
-            <a:ext cx="4754520" cy="822600"/>
+            <a:ext cx="4754160" cy="822240"/>
           </a:xfrm>
           <a:prstGeom prst="rect">
             <a:avLst/>
@@ -19910,7 +19828,7 @@
         <p:spPr>
           <a:xfrm>
             <a:off x="1005840" y="1463040"/>
-            <a:ext cx="1462680" cy="1462680"/>
+            <a:ext cx="1462320" cy="1462320"/>
           </a:xfrm>
           <a:prstGeom prst="rect">
             <a:avLst/>
@@ -19966,7 +19884,7 @@
         <p:spPr>
           <a:xfrm>
             <a:off x="0" y="0"/>
-            <a:ext cx="9143640" cy="959760"/>
+            <a:ext cx="9143280" cy="959400"/>
           </a:xfrm>
           <a:prstGeom prst="rect">
             <a:avLst/>
@@ -19994,7 +19912,7 @@
         <p:spPr>
           <a:xfrm>
             <a:off x="0" y="960120"/>
-            <a:ext cx="9143640" cy="54360"/>
+            <a:ext cx="9143280" cy="54000"/>
           </a:xfrm>
           <a:prstGeom prst="rect">
             <a:avLst/>
@@ -20026,7 +19944,7 @@
         <p:spPr>
           <a:xfrm>
             <a:off x="320040" y="182880"/>
-            <a:ext cx="548280" cy="548280"/>
+            <a:ext cx="547920" cy="547920"/>
           </a:xfrm>
           <a:prstGeom prst="rect">
             <a:avLst/>
@@ -20045,7 +19963,7 @@
         <p:spPr>
           <a:xfrm>
             <a:off x="1005840" y="182880"/>
-            <a:ext cx="7772040" cy="594000"/>
+            <a:ext cx="7771680" cy="593640"/>
           </a:xfrm>
           <a:prstGeom prst="rect">
             <a:avLst/>
@@ -20100,7 +20018,7 @@
         <p:spPr>
           <a:xfrm>
             <a:off x="320040" y="1143000"/>
-            <a:ext cx="8503560" cy="914040"/>
+            <a:ext cx="8503200" cy="913680"/>
           </a:xfrm>
           <a:prstGeom prst="rect">
             <a:avLst/>
@@ -20130,7 +20048,7 @@
         <p:spPr>
           <a:xfrm>
             <a:off x="320040" y="1143000"/>
-            <a:ext cx="63720" cy="914040"/>
+            <a:ext cx="63360" cy="913680"/>
           </a:xfrm>
           <a:prstGeom prst="rect">
             <a:avLst/>
@@ -20158,7 +20076,7 @@
         <p:spPr>
           <a:xfrm>
             <a:off x="475560" y="1188720"/>
-            <a:ext cx="3657240" cy="273960"/>
+            <a:ext cx="3656880" cy="273600"/>
           </a:xfrm>
           <a:prstGeom prst="rect">
             <a:avLst/>
@@ -20213,7 +20131,7 @@
         <p:spPr>
           <a:xfrm>
             <a:off x="475560" y="1435680"/>
-            <a:ext cx="8229240" cy="502560"/>
+            <a:ext cx="8228880" cy="502200"/>
           </a:xfrm>
           <a:prstGeom prst="rect">
             <a:avLst/>
@@ -20268,7 +20186,7 @@
         <p:spPr>
           <a:xfrm>
             <a:off x="320040" y="2212920"/>
-            <a:ext cx="3931560" cy="2514240"/>
+            <a:ext cx="3931200" cy="2513880"/>
           </a:xfrm>
           <a:prstGeom prst="rect">
             <a:avLst/>
@@ -20303,7 +20221,7 @@
         <p:spPr>
           <a:xfrm>
             <a:off x="320040" y="2212920"/>
-            <a:ext cx="3931560" cy="365400"/>
+            <a:ext cx="3931200" cy="365040"/>
           </a:xfrm>
           <a:prstGeom prst="rect">
             <a:avLst/>
@@ -20333,7 +20251,7 @@
         <p:spPr>
           <a:xfrm>
             <a:off x="457200" y="2249280"/>
-            <a:ext cx="3657240" cy="273960"/>
+            <a:ext cx="3656880" cy="273600"/>
           </a:xfrm>
           <a:prstGeom prst="rect">
             <a:avLst/>
@@ -20398,7 +20316,7 @@
         <p:spPr>
           <a:xfrm>
             <a:off x="457200" y="2651760"/>
-            <a:ext cx="3657240" cy="1919880"/>
+            <a:ext cx="3656880" cy="1919520"/>
           </a:xfrm>
           <a:prstGeom prst="rect">
             <a:avLst/>
@@ -20593,7 +20511,7 @@
         <p:spPr>
           <a:xfrm>
             <a:off x="4846320" y="2212920"/>
-            <a:ext cx="3977280" cy="2514240"/>
+            <a:ext cx="3976920" cy="2513880"/>
           </a:xfrm>
           <a:prstGeom prst="rect">
             <a:avLst/>
@@ -20628,7 +20546,7 @@
         <p:spPr>
           <a:xfrm>
             <a:off x="4846320" y="2212920"/>
-            <a:ext cx="3977280" cy="365400"/>
+            <a:ext cx="3976920" cy="365040"/>
           </a:xfrm>
           <a:prstGeom prst="rect">
             <a:avLst/>
@@ -20658,7 +20576,7 @@
         <p:spPr>
           <a:xfrm>
             <a:off x="4983480" y="2249280"/>
-            <a:ext cx="3657240" cy="273960"/>
+            <a:ext cx="3656880" cy="273600"/>
           </a:xfrm>
           <a:prstGeom prst="rect">
             <a:avLst/>
@@ -20723,7 +20641,7 @@
         <p:spPr>
           <a:xfrm>
             <a:off x="4983480" y="2651760"/>
-            <a:ext cx="3748680" cy="1919880"/>
+            <a:ext cx="3748320" cy="1919520"/>
           </a:xfrm>
           <a:prstGeom prst="rect">
             <a:avLst/>
@@ -20922,7 +20840,7 @@
         <p:spPr>
           <a:xfrm>
             <a:off x="320040" y="4782240"/>
-            <a:ext cx="8503560" cy="273960"/>
+            <a:ext cx="8503200" cy="273600"/>
           </a:xfrm>
           <a:prstGeom prst="rect">
             <a:avLst/>
@@ -20952,7 +20870,7 @@
         <p:spPr>
           <a:xfrm>
             <a:off x="457200" y="4809600"/>
-            <a:ext cx="8229240" cy="219240"/>
+            <a:ext cx="8228880" cy="218880"/>
           </a:xfrm>
           <a:prstGeom prst="rect">
             <a:avLst/>
